--- a/DEV-1-16/for_students/DAY-2/ppt/dev1_08.pptx
+++ b/DEV-1-16/for_students/DAY-2/ppt/dev1_08.pptx
@@ -269,7 +269,7 @@
           <a:p>
             <a:fld id="{EF790F8C-5FB9-4EFE-BCC7-F735A3026FD8}" type="datetimeFigureOut">
               <a:rPr lang="ru-RU" smtClean="0"/>
-              <a:t>20.09.2024</a:t>
+              <a:t>11.12.2025</a:t>
             </a:fld>
             <a:endParaRPr lang="ru-RU"/>
           </a:p>
@@ -467,7 +467,7 @@
           <a:p>
             <a:fld id="{EF790F8C-5FB9-4EFE-BCC7-F735A3026FD8}" type="datetimeFigureOut">
               <a:rPr lang="ru-RU" smtClean="0"/>
-              <a:t>20.09.2024</a:t>
+              <a:t>11.12.2025</a:t>
             </a:fld>
             <a:endParaRPr lang="ru-RU"/>
           </a:p>
@@ -675,7 +675,7 @@
           <a:p>
             <a:fld id="{EF790F8C-5FB9-4EFE-BCC7-F735A3026FD8}" type="datetimeFigureOut">
               <a:rPr lang="ru-RU" smtClean="0"/>
-              <a:t>20.09.2024</a:t>
+              <a:t>11.12.2025</a:t>
             </a:fld>
             <a:endParaRPr lang="ru-RU"/>
           </a:p>
@@ -1687,7 +1687,7 @@
           <a:p>
             <a:fld id="{EF790F8C-5FB9-4EFE-BCC7-F735A3026FD8}" type="datetimeFigureOut">
               <a:rPr lang="ru-RU" smtClean="0"/>
-              <a:t>20.09.2024</a:t>
+              <a:t>11.12.2025</a:t>
             </a:fld>
             <a:endParaRPr lang="ru-RU"/>
           </a:p>
@@ -2798,7 +2798,7 @@
           <a:p>
             <a:fld id="{EF790F8C-5FB9-4EFE-BCC7-F735A3026FD8}" type="datetimeFigureOut">
               <a:rPr lang="ru-RU" smtClean="0"/>
-              <a:t>20.09.2024</a:t>
+              <a:t>11.12.2025</a:t>
             </a:fld>
             <a:endParaRPr lang="ru-RU"/>
           </a:p>
@@ -3073,7 +3073,7 @@
           <a:p>
             <a:fld id="{EF790F8C-5FB9-4EFE-BCC7-F735A3026FD8}" type="datetimeFigureOut">
               <a:rPr lang="ru-RU" smtClean="0"/>
-              <a:t>20.09.2024</a:t>
+              <a:t>11.12.2025</a:t>
             </a:fld>
             <a:endParaRPr lang="ru-RU"/>
           </a:p>
@@ -3338,7 +3338,7 @@
           <a:p>
             <a:fld id="{EF790F8C-5FB9-4EFE-BCC7-F735A3026FD8}" type="datetimeFigureOut">
               <a:rPr lang="ru-RU" smtClean="0"/>
-              <a:t>20.09.2024</a:t>
+              <a:t>11.12.2025</a:t>
             </a:fld>
             <a:endParaRPr lang="ru-RU"/>
           </a:p>
@@ -3750,7 +3750,7 @@
           <a:p>
             <a:fld id="{EF790F8C-5FB9-4EFE-BCC7-F735A3026FD8}" type="datetimeFigureOut">
               <a:rPr lang="ru-RU" smtClean="0"/>
-              <a:t>20.09.2024</a:t>
+              <a:t>11.12.2025</a:t>
             </a:fld>
             <a:endParaRPr lang="ru-RU"/>
           </a:p>
@@ -3891,7 +3891,7 @@
           <a:p>
             <a:fld id="{EF790F8C-5FB9-4EFE-BCC7-F735A3026FD8}" type="datetimeFigureOut">
               <a:rPr lang="ru-RU" smtClean="0"/>
-              <a:t>20.09.2024</a:t>
+              <a:t>11.12.2025</a:t>
             </a:fld>
             <a:endParaRPr lang="ru-RU"/>
           </a:p>
@@ -4004,7 +4004,7 @@
           <a:p>
             <a:fld id="{EF790F8C-5FB9-4EFE-BCC7-F735A3026FD8}" type="datetimeFigureOut">
               <a:rPr lang="ru-RU" smtClean="0"/>
-              <a:t>20.09.2024</a:t>
+              <a:t>11.12.2025</a:t>
             </a:fld>
             <a:endParaRPr lang="ru-RU"/>
           </a:p>
@@ -4315,7 +4315,7 @@
           <a:p>
             <a:fld id="{EF790F8C-5FB9-4EFE-BCC7-F735A3026FD8}" type="datetimeFigureOut">
               <a:rPr lang="ru-RU" smtClean="0"/>
-              <a:t>20.09.2024</a:t>
+              <a:t>11.12.2025</a:t>
             </a:fld>
             <a:endParaRPr lang="ru-RU"/>
           </a:p>
@@ -4603,7 +4603,7 @@
           <a:p>
             <a:fld id="{EF790F8C-5FB9-4EFE-BCC7-F735A3026FD8}" type="datetimeFigureOut">
               <a:rPr lang="ru-RU" smtClean="0"/>
-              <a:t>20.09.2024</a:t>
+              <a:t>11.12.2025</a:t>
             </a:fld>
             <a:endParaRPr lang="ru-RU"/>
           </a:p>
@@ -4844,7 +4844,7 @@
           <a:p>
             <a:fld id="{EF790F8C-5FB9-4EFE-BCC7-F735A3026FD8}" type="datetimeFigureOut">
               <a:rPr lang="ru-RU" smtClean="0"/>
-              <a:t>20.09.2024</a:t>
+              <a:t>11.12.2025</a:t>
             </a:fld>
             <a:endParaRPr lang="ru-RU"/>
           </a:p>
@@ -6006,7 +6006,7 @@
 </file>
 
 <file path=ppt/slides/slide1.xml><?xml version="1.0" encoding="utf-8"?>
-<p:sld xmlns:a="http://schemas.openxmlformats.org/drawingml/2006/main" xmlns:r="http://schemas.openxmlformats.org/officeDocument/2006/relationships" xmlns:p="http://schemas.openxmlformats.org/presentationml/2006/main">
+<p:sld xmlns:a="http://schemas.openxmlformats.org/drawingml/2006/main" xmlns:r="http://schemas.openxmlformats.org/officeDocument/2006/relationships" xmlns:p="http://schemas.openxmlformats.org/presentationml/2006/main" showMasterSp="0">
   <p:cSld>
     <p:spTree>
       <p:nvGrpSpPr>

--- a/DEV-1-16/for_students/DAY-2/ppt/dev1_08.pptx
+++ b/DEV-1-16/for_students/DAY-2/ppt/dev1_08.pptx
@@ -9,13 +9,14 @@
     <p:sldId id="263" r:id="rId3"/>
     <p:sldId id="258" r:id="rId4"/>
     <p:sldId id="272" r:id="rId5"/>
-    <p:sldId id="273" r:id="rId6"/>
-    <p:sldId id="274" r:id="rId7"/>
-    <p:sldId id="275" r:id="rId8"/>
-    <p:sldId id="276" r:id="rId9"/>
-    <p:sldId id="277" r:id="rId10"/>
-    <p:sldId id="278" r:id="rId11"/>
-    <p:sldId id="279" r:id="rId12"/>
+    <p:sldId id="280" r:id="rId6"/>
+    <p:sldId id="273" r:id="rId7"/>
+    <p:sldId id="274" r:id="rId8"/>
+    <p:sldId id="275" r:id="rId9"/>
+    <p:sldId id="276" r:id="rId10"/>
+    <p:sldId id="277" r:id="rId11"/>
+    <p:sldId id="278" r:id="rId12"/>
+    <p:sldId id="279" r:id="rId13"/>
   </p:sldIdLst>
   <p:sldSz cx="12192000" cy="6858000"/>
   <p:notesSz cx="6858000" cy="9144000"/>
@@ -269,7 +270,7 @@
           <a:p>
             <a:fld id="{EF790F8C-5FB9-4EFE-BCC7-F735A3026FD8}" type="datetimeFigureOut">
               <a:rPr lang="ru-RU" smtClean="0"/>
-              <a:t>11.12.2025</a:t>
+              <a:t>12.12.2025</a:t>
             </a:fld>
             <a:endParaRPr lang="ru-RU"/>
           </a:p>
@@ -467,7 +468,7 @@
           <a:p>
             <a:fld id="{EF790F8C-5FB9-4EFE-BCC7-F735A3026FD8}" type="datetimeFigureOut">
               <a:rPr lang="ru-RU" smtClean="0"/>
-              <a:t>11.12.2025</a:t>
+              <a:t>12.12.2025</a:t>
             </a:fld>
             <a:endParaRPr lang="ru-RU"/>
           </a:p>
@@ -675,7 +676,7 @@
           <a:p>
             <a:fld id="{EF790F8C-5FB9-4EFE-BCC7-F735A3026FD8}" type="datetimeFigureOut">
               <a:rPr lang="ru-RU" smtClean="0"/>
-              <a:t>11.12.2025</a:t>
+              <a:t>12.12.2025</a:t>
             </a:fld>
             <a:endParaRPr lang="ru-RU"/>
           </a:p>
@@ -1687,7 +1688,7 @@
           <a:p>
             <a:fld id="{EF790F8C-5FB9-4EFE-BCC7-F735A3026FD8}" type="datetimeFigureOut">
               <a:rPr lang="ru-RU" smtClean="0"/>
-              <a:t>11.12.2025</a:t>
+              <a:t>12.12.2025</a:t>
             </a:fld>
             <a:endParaRPr lang="ru-RU"/>
           </a:p>
@@ -2798,7 +2799,7 @@
           <a:p>
             <a:fld id="{EF790F8C-5FB9-4EFE-BCC7-F735A3026FD8}" type="datetimeFigureOut">
               <a:rPr lang="ru-RU" smtClean="0"/>
-              <a:t>11.12.2025</a:t>
+              <a:t>12.12.2025</a:t>
             </a:fld>
             <a:endParaRPr lang="ru-RU"/>
           </a:p>
@@ -3073,7 +3074,7 @@
           <a:p>
             <a:fld id="{EF790F8C-5FB9-4EFE-BCC7-F735A3026FD8}" type="datetimeFigureOut">
               <a:rPr lang="ru-RU" smtClean="0"/>
-              <a:t>11.12.2025</a:t>
+              <a:t>12.12.2025</a:t>
             </a:fld>
             <a:endParaRPr lang="ru-RU"/>
           </a:p>
@@ -3338,7 +3339,7 @@
           <a:p>
             <a:fld id="{EF790F8C-5FB9-4EFE-BCC7-F735A3026FD8}" type="datetimeFigureOut">
               <a:rPr lang="ru-RU" smtClean="0"/>
-              <a:t>11.12.2025</a:t>
+              <a:t>12.12.2025</a:t>
             </a:fld>
             <a:endParaRPr lang="ru-RU"/>
           </a:p>
@@ -3750,7 +3751,7 @@
           <a:p>
             <a:fld id="{EF790F8C-5FB9-4EFE-BCC7-F735A3026FD8}" type="datetimeFigureOut">
               <a:rPr lang="ru-RU" smtClean="0"/>
-              <a:t>11.12.2025</a:t>
+              <a:t>12.12.2025</a:t>
             </a:fld>
             <a:endParaRPr lang="ru-RU"/>
           </a:p>
@@ -3891,7 +3892,7 @@
           <a:p>
             <a:fld id="{EF790F8C-5FB9-4EFE-BCC7-F735A3026FD8}" type="datetimeFigureOut">
               <a:rPr lang="ru-RU" smtClean="0"/>
-              <a:t>11.12.2025</a:t>
+              <a:t>12.12.2025</a:t>
             </a:fld>
             <a:endParaRPr lang="ru-RU"/>
           </a:p>
@@ -4004,7 +4005,7 @@
           <a:p>
             <a:fld id="{EF790F8C-5FB9-4EFE-BCC7-F735A3026FD8}" type="datetimeFigureOut">
               <a:rPr lang="ru-RU" smtClean="0"/>
-              <a:t>11.12.2025</a:t>
+              <a:t>12.12.2025</a:t>
             </a:fld>
             <a:endParaRPr lang="ru-RU"/>
           </a:p>
@@ -4315,7 +4316,7 @@
           <a:p>
             <a:fld id="{EF790F8C-5FB9-4EFE-BCC7-F735A3026FD8}" type="datetimeFigureOut">
               <a:rPr lang="ru-RU" smtClean="0"/>
-              <a:t>11.12.2025</a:t>
+              <a:t>12.12.2025</a:t>
             </a:fld>
             <a:endParaRPr lang="ru-RU"/>
           </a:p>
@@ -4603,7 +4604,7 @@
           <a:p>
             <a:fld id="{EF790F8C-5FB9-4EFE-BCC7-F735A3026FD8}" type="datetimeFigureOut">
               <a:rPr lang="ru-RU" smtClean="0"/>
-              <a:t>11.12.2025</a:t>
+              <a:t>12.12.2025</a:t>
             </a:fld>
             <a:endParaRPr lang="ru-RU"/>
           </a:p>
@@ -4844,7 +4845,7 @@
           <a:p>
             <a:fld id="{EF790F8C-5FB9-4EFE-BCC7-F735A3026FD8}" type="datetimeFigureOut">
               <a:rPr lang="ru-RU" smtClean="0"/>
-              <a:t>11.12.2025</a:t>
+              <a:t>12.12.2025</a:t>
             </a:fld>
             <a:endParaRPr lang="ru-RU"/>
           </a:p>
@@ -6182,6 +6183,66 @@
           <p:cNvPr id="2" name="Рисунок 1">
             <a:extLst>
               <a:ext uri="{FF2B5EF4-FFF2-40B4-BE49-F238E27FC236}">
+                <a16:creationId xmlns:a16="http://schemas.microsoft.com/office/drawing/2014/main" id="{CB2D8F1A-EF7F-4E17-AC78-30ED17732383}"/>
+              </a:ext>
+            </a:extLst>
+          </p:cNvPr>
+          <p:cNvPicPr>
+            <a:picLocks noChangeAspect="1"/>
+          </p:cNvPicPr>
+          <p:nvPr/>
+        </p:nvPicPr>
+        <p:blipFill>
+          <a:blip r:embed="rId2"/>
+          <a:stretch>
+            <a:fillRect/>
+          </a:stretch>
+        </p:blipFill>
+        <p:spPr>
+          <a:xfrm>
+            <a:off x="1543474" y="0"/>
+            <a:ext cx="9105052" cy="6858000"/>
+          </a:xfrm>
+          <a:prstGeom prst="rect">
+            <a:avLst/>
+          </a:prstGeom>
+        </p:spPr>
+      </p:pic>
+    </p:spTree>
+    <p:extLst>
+      <p:ext uri="{BB962C8B-B14F-4D97-AF65-F5344CB8AC3E}">
+        <p14:creationId xmlns:p14="http://schemas.microsoft.com/office/powerpoint/2010/main" val="3333639815"/>
+      </p:ext>
+    </p:extLst>
+  </p:cSld>
+  <p:clrMapOvr>
+    <a:masterClrMapping/>
+  </p:clrMapOvr>
+</p:sld>
+</file>
+
+<file path=ppt/slides/slide11.xml><?xml version="1.0" encoding="utf-8"?>
+<p:sld xmlns:a="http://schemas.openxmlformats.org/drawingml/2006/main" xmlns:r="http://schemas.openxmlformats.org/officeDocument/2006/relationships" xmlns:p="http://schemas.openxmlformats.org/presentationml/2006/main">
+  <p:cSld>
+    <p:spTree>
+      <p:nvGrpSpPr>
+        <p:cNvPr id="1" name=""/>
+        <p:cNvGrpSpPr/>
+        <p:nvPr/>
+      </p:nvGrpSpPr>
+      <p:grpSpPr>
+        <a:xfrm>
+          <a:off x="0" y="0"/>
+          <a:ext cx="0" cy="0"/>
+          <a:chOff x="0" y="0"/>
+          <a:chExt cx="0" cy="0"/>
+        </a:xfrm>
+      </p:grpSpPr>
+      <p:pic>
+        <p:nvPicPr>
+          <p:cNvPr id="2" name="Рисунок 1">
+            <a:extLst>
+              <a:ext uri="{FF2B5EF4-FFF2-40B4-BE49-F238E27FC236}">
                 <a16:creationId xmlns:a16="http://schemas.microsoft.com/office/drawing/2014/main" id="{736611FB-65F7-4EA6-B619-7F77D13A33B3}"/>
               </a:ext>
             </a:extLst>
@@ -6297,6 +6358,3829 @@
           <a:chExt cx="0" cy="0"/>
         </a:xfrm>
       </p:grpSpPr>
+      <p:graphicFrame>
+        <p:nvGraphicFramePr>
+          <p:cNvPr id="5" name="Таблица 4">
+            <a:extLst>
+              <a:ext uri="{FF2B5EF4-FFF2-40B4-BE49-F238E27FC236}">
+                <a16:creationId xmlns:a16="http://schemas.microsoft.com/office/drawing/2014/main" id="{E798D073-A7E6-401D-A186-0A278D3C5FF6}"/>
+              </a:ext>
+            </a:extLst>
+          </p:cNvPr>
+          <p:cNvGraphicFramePr>
+            <a:graphicFrameLocks noGrp="1"/>
+          </p:cNvGraphicFramePr>
+          <p:nvPr>
+            <p:extLst>
+              <p:ext uri="{D42A27DB-BD31-4B8C-83A1-F6EECF244321}">
+                <p14:modId xmlns:p14="http://schemas.microsoft.com/office/powerpoint/2010/main" val="121249416"/>
+              </p:ext>
+            </p:extLst>
+          </p:nvPr>
+        </p:nvGraphicFramePr>
+        <p:xfrm>
+          <a:off x="431322" y="405442"/>
+          <a:ext cx="10843405" cy="5840080"/>
+        </p:xfrm>
+        <a:graphic>
+          <a:graphicData uri="http://schemas.openxmlformats.org/drawingml/2006/table">
+            <a:tbl>
+              <a:tblPr/>
+              <a:tblGrid>
+                <a:gridCol w="2282822">
+                  <a:extLst>
+                    <a:ext uri="{9D8B030D-6E8A-4147-A177-3AD203B41FA5}">
+                      <a16:colId xmlns:a16="http://schemas.microsoft.com/office/drawing/2014/main" val="3022709829"/>
+                    </a:ext>
+                  </a:extLst>
+                </a:gridCol>
+                <a:gridCol w="2687072">
+                  <a:extLst>
+                    <a:ext uri="{9D8B030D-6E8A-4147-A177-3AD203B41FA5}">
+                      <a16:colId xmlns:a16="http://schemas.microsoft.com/office/drawing/2014/main" val="1416270225"/>
+                    </a:ext>
+                  </a:extLst>
+                </a:gridCol>
+                <a:gridCol w="1957837">
+                  <a:extLst>
+                    <a:ext uri="{9D8B030D-6E8A-4147-A177-3AD203B41FA5}">
+                      <a16:colId xmlns:a16="http://schemas.microsoft.com/office/drawing/2014/main" val="2664417933"/>
+                    </a:ext>
+                  </a:extLst>
+                </a:gridCol>
+                <a:gridCol w="1957837">
+                  <a:extLst>
+                    <a:ext uri="{9D8B030D-6E8A-4147-A177-3AD203B41FA5}">
+                      <a16:colId xmlns:a16="http://schemas.microsoft.com/office/drawing/2014/main" val="1375404829"/>
+                    </a:ext>
+                  </a:extLst>
+                </a:gridCol>
+                <a:gridCol w="1957837">
+                  <a:extLst>
+                    <a:ext uri="{9D8B030D-6E8A-4147-A177-3AD203B41FA5}">
+                      <a16:colId xmlns:a16="http://schemas.microsoft.com/office/drawing/2014/main" val="1293904766"/>
+                    </a:ext>
+                  </a:extLst>
+                </a:gridCol>
+              </a:tblGrid>
+              <a:tr h="505586">
+                <a:tc>
+                  <a:txBody>
+                    <a:bodyPr/>
+                    <a:lstStyle/>
+                    <a:p>
+                      <a:pPr algn="ctr" fontAlgn="ctr"/>
+                      <a:r>
+                        <a:rPr lang="ru-RU" sz="900" b="1" i="0" u="none" strike="noStrike">
+                          <a:solidFill>
+                            <a:srgbClr val="000000"/>
+                          </a:solidFill>
+                          <a:effectLst/>
+                          <a:latin typeface="Times New Roman" panose="02020603050405020304" pitchFamily="18" charset="0"/>
+                        </a:rPr>
+                        <a:t>Характеристика</a:t>
+                      </a:r>
+                    </a:p>
+                  </a:txBody>
+                  <a:tcPr marL="7124" marR="7124" marT="7124" marB="0" anchor="ctr">
+                    <a:lnL w="6350" cap="flat" cmpd="sng" algn="ctr">
+                      <a:solidFill>
+                        <a:srgbClr val="000000"/>
+                      </a:solidFill>
+                      <a:prstDash val="solid"/>
+                      <a:round/>
+                      <a:headEnd type="none" w="med" len="med"/>
+                      <a:tailEnd type="none" w="med" len="med"/>
+                    </a:lnL>
+                    <a:lnR w="6350" cap="flat" cmpd="sng" algn="ctr">
+                      <a:solidFill>
+                        <a:srgbClr val="000000"/>
+                      </a:solidFill>
+                      <a:prstDash val="solid"/>
+                      <a:round/>
+                      <a:headEnd type="none" w="med" len="med"/>
+                      <a:tailEnd type="none" w="med" len="med"/>
+                    </a:lnR>
+                    <a:lnT w="6350" cap="flat" cmpd="sng" algn="ctr">
+                      <a:solidFill>
+                        <a:srgbClr val="000000"/>
+                      </a:solidFill>
+                      <a:prstDash val="solid"/>
+                      <a:round/>
+                      <a:headEnd type="none" w="med" len="med"/>
+                      <a:tailEnd type="none" w="med" len="med"/>
+                    </a:lnT>
+                    <a:lnB w="6350" cap="flat" cmpd="sng" algn="ctr">
+                      <a:solidFill>
+                        <a:srgbClr val="000000"/>
+                      </a:solidFill>
+                      <a:prstDash val="solid"/>
+                      <a:round/>
+                      <a:headEnd type="none" w="med" len="med"/>
+                      <a:tailEnd type="none" w="med" len="med"/>
+                    </a:lnB>
+                  </a:tcPr>
+                </a:tc>
+                <a:tc>
+                  <a:txBody>
+                    <a:bodyPr/>
+                    <a:lstStyle/>
+                    <a:p>
+                      <a:pPr algn="ctr" fontAlgn="ctr"/>
+                      <a:r>
+                        <a:rPr lang="ru-RU" sz="1000" b="1" i="0" u="none" strike="noStrike">
+                          <a:solidFill>
+                            <a:srgbClr val="000000"/>
+                          </a:solidFill>
+                          <a:effectLst/>
+                          <a:latin typeface="Times New Roman" panose="02020603050405020304" pitchFamily="18" charset="0"/>
+                        </a:rPr>
+                        <a:t>Подготовленные операторы (</a:t>
+                      </a:r>
+                      <a:r>
+                        <a:rPr lang="en-US" sz="1000" b="1" i="0" u="none" strike="noStrike">
+                          <a:solidFill>
+                            <a:srgbClr val="000000"/>
+                          </a:solidFill>
+                          <a:effectLst/>
+                          <a:latin typeface="Times New Roman" panose="02020603050405020304" pitchFamily="18" charset="0"/>
+                        </a:rPr>
+                        <a:t>PREPARE)</a:t>
+                      </a:r>
+                    </a:p>
+                  </a:txBody>
+                  <a:tcPr marL="7124" marR="7124" marT="7124" marB="0" anchor="ctr">
+                    <a:lnL w="6350" cap="flat" cmpd="sng" algn="ctr">
+                      <a:solidFill>
+                        <a:srgbClr val="000000"/>
+                      </a:solidFill>
+                      <a:prstDash val="solid"/>
+                      <a:round/>
+                      <a:headEnd type="none" w="med" len="med"/>
+                      <a:tailEnd type="none" w="med" len="med"/>
+                    </a:lnL>
+                    <a:lnR w="6350" cap="flat" cmpd="sng" algn="ctr">
+                      <a:solidFill>
+                        <a:srgbClr val="000000"/>
+                      </a:solidFill>
+                      <a:prstDash val="solid"/>
+                      <a:round/>
+                      <a:headEnd type="none" w="med" len="med"/>
+                      <a:tailEnd type="none" w="med" len="med"/>
+                    </a:lnR>
+                    <a:lnT w="6350" cap="flat" cmpd="sng" algn="ctr">
+                      <a:solidFill>
+                        <a:srgbClr val="000000"/>
+                      </a:solidFill>
+                      <a:prstDash val="solid"/>
+                      <a:round/>
+                      <a:headEnd type="none" w="med" len="med"/>
+                      <a:tailEnd type="none" w="med" len="med"/>
+                    </a:lnT>
+                    <a:lnB w="6350" cap="flat" cmpd="sng" algn="ctr">
+                      <a:solidFill>
+                        <a:srgbClr val="000000"/>
+                      </a:solidFill>
+                      <a:prstDash val="solid"/>
+                      <a:round/>
+                      <a:headEnd type="none" w="med" len="med"/>
+                      <a:tailEnd type="none" w="med" len="med"/>
+                    </a:lnB>
+                  </a:tcPr>
+                </a:tc>
+                <a:tc>
+                  <a:txBody>
+                    <a:bodyPr/>
+                    <a:lstStyle/>
+                    <a:p>
+                      <a:pPr algn="ctr" fontAlgn="ctr"/>
+                      <a:r>
+                        <a:rPr lang="ru-RU" sz="1000" b="1" i="0" u="none" strike="noStrike">
+                          <a:solidFill>
+                            <a:srgbClr val="000000"/>
+                          </a:solidFill>
+                          <a:effectLst/>
+                          <a:latin typeface="Times New Roman" panose="02020603050405020304" pitchFamily="18" charset="0"/>
+                        </a:rPr>
+                        <a:t>Представления (</a:t>
+                      </a:r>
+                      <a:r>
+                        <a:rPr lang="en-US" sz="1000" b="1" i="0" u="none" strike="noStrike">
+                          <a:solidFill>
+                            <a:srgbClr val="000000"/>
+                          </a:solidFill>
+                          <a:effectLst/>
+                          <a:latin typeface="Times New Roman" panose="02020603050405020304" pitchFamily="18" charset="0"/>
+                        </a:rPr>
+                        <a:t>VIEW)</a:t>
+                      </a:r>
+                    </a:p>
+                  </a:txBody>
+                  <a:tcPr marL="7124" marR="7124" marT="7124" marB="0" anchor="ctr">
+                    <a:lnL w="6350" cap="flat" cmpd="sng" algn="ctr">
+                      <a:solidFill>
+                        <a:srgbClr val="000000"/>
+                      </a:solidFill>
+                      <a:prstDash val="solid"/>
+                      <a:round/>
+                      <a:headEnd type="none" w="med" len="med"/>
+                      <a:tailEnd type="none" w="med" len="med"/>
+                    </a:lnL>
+                    <a:lnR w="6350" cap="flat" cmpd="sng" algn="ctr">
+                      <a:solidFill>
+                        <a:srgbClr val="000000"/>
+                      </a:solidFill>
+                      <a:prstDash val="solid"/>
+                      <a:round/>
+                      <a:headEnd type="none" w="med" len="med"/>
+                      <a:tailEnd type="none" w="med" len="med"/>
+                    </a:lnR>
+                    <a:lnT w="6350" cap="flat" cmpd="sng" algn="ctr">
+                      <a:solidFill>
+                        <a:srgbClr val="000000"/>
+                      </a:solidFill>
+                      <a:prstDash val="solid"/>
+                      <a:round/>
+                      <a:headEnd type="none" w="med" len="med"/>
+                      <a:tailEnd type="none" w="med" len="med"/>
+                    </a:lnT>
+                    <a:lnB w="6350" cap="flat" cmpd="sng" algn="ctr">
+                      <a:solidFill>
+                        <a:srgbClr val="000000"/>
+                      </a:solidFill>
+                      <a:prstDash val="solid"/>
+                      <a:round/>
+                      <a:headEnd type="none" w="med" len="med"/>
+                      <a:tailEnd type="none" w="med" len="med"/>
+                    </a:lnB>
+                  </a:tcPr>
+                </a:tc>
+                <a:tc>
+                  <a:txBody>
+                    <a:bodyPr/>
+                    <a:lstStyle/>
+                    <a:p>
+                      <a:pPr algn="ctr" fontAlgn="ctr"/>
+                      <a:r>
+                        <a:rPr lang="ru-RU" sz="1000" b="1" i="0" u="none" strike="noStrike">
+                          <a:solidFill>
+                            <a:srgbClr val="000000"/>
+                          </a:solidFill>
+                          <a:effectLst/>
+                          <a:latin typeface="Times New Roman" panose="02020603050405020304" pitchFamily="18" charset="0"/>
+                        </a:rPr>
+                        <a:t>Процедуры (</a:t>
+                      </a:r>
+                      <a:r>
+                        <a:rPr lang="en-US" sz="1000" b="1" i="0" u="none" strike="noStrike">
+                          <a:solidFill>
+                            <a:srgbClr val="000000"/>
+                          </a:solidFill>
+                          <a:effectLst/>
+                          <a:latin typeface="Times New Roman" panose="02020603050405020304" pitchFamily="18" charset="0"/>
+                        </a:rPr>
+                        <a:t>PROCEDURE)</a:t>
+                      </a:r>
+                    </a:p>
+                  </a:txBody>
+                  <a:tcPr marL="7124" marR="7124" marT="7124" marB="0" anchor="ctr">
+                    <a:lnL w="6350" cap="flat" cmpd="sng" algn="ctr">
+                      <a:solidFill>
+                        <a:srgbClr val="000000"/>
+                      </a:solidFill>
+                      <a:prstDash val="solid"/>
+                      <a:round/>
+                      <a:headEnd type="none" w="med" len="med"/>
+                      <a:tailEnd type="none" w="med" len="med"/>
+                    </a:lnL>
+                    <a:lnR w="6350" cap="flat" cmpd="sng" algn="ctr">
+                      <a:solidFill>
+                        <a:srgbClr val="000000"/>
+                      </a:solidFill>
+                      <a:prstDash val="solid"/>
+                      <a:round/>
+                      <a:headEnd type="none" w="med" len="med"/>
+                      <a:tailEnd type="none" w="med" len="med"/>
+                    </a:lnR>
+                    <a:lnT w="6350" cap="flat" cmpd="sng" algn="ctr">
+                      <a:solidFill>
+                        <a:srgbClr val="000000"/>
+                      </a:solidFill>
+                      <a:prstDash val="solid"/>
+                      <a:round/>
+                      <a:headEnd type="none" w="med" len="med"/>
+                      <a:tailEnd type="none" w="med" len="med"/>
+                    </a:lnT>
+                    <a:lnB w="6350" cap="flat" cmpd="sng" algn="ctr">
+                      <a:solidFill>
+                        <a:srgbClr val="000000"/>
+                      </a:solidFill>
+                      <a:prstDash val="solid"/>
+                      <a:round/>
+                      <a:headEnd type="none" w="med" len="med"/>
+                      <a:tailEnd type="none" w="med" len="med"/>
+                    </a:lnB>
+                  </a:tcPr>
+                </a:tc>
+                <a:tc>
+                  <a:txBody>
+                    <a:bodyPr/>
+                    <a:lstStyle/>
+                    <a:p>
+                      <a:pPr algn="ctr" fontAlgn="ctr"/>
+                      <a:r>
+                        <a:rPr lang="ru-RU" sz="1000" b="1" i="0" u="none" strike="noStrike">
+                          <a:solidFill>
+                            <a:srgbClr val="000000"/>
+                          </a:solidFill>
+                          <a:effectLst/>
+                          <a:latin typeface="Times New Roman" panose="02020603050405020304" pitchFamily="18" charset="0"/>
+                        </a:rPr>
+                        <a:t>Функции (</a:t>
+                      </a:r>
+                      <a:r>
+                        <a:rPr lang="en-US" sz="1000" b="1" i="0" u="none" strike="noStrike">
+                          <a:solidFill>
+                            <a:srgbClr val="000000"/>
+                          </a:solidFill>
+                          <a:effectLst/>
+                          <a:latin typeface="Times New Roman" panose="02020603050405020304" pitchFamily="18" charset="0"/>
+                        </a:rPr>
+                        <a:t>FUNCTION)</a:t>
+                      </a:r>
+                    </a:p>
+                  </a:txBody>
+                  <a:tcPr marL="7124" marR="7124" marT="7124" marB="0" anchor="ctr">
+                    <a:lnL w="6350" cap="flat" cmpd="sng" algn="ctr">
+                      <a:solidFill>
+                        <a:srgbClr val="000000"/>
+                      </a:solidFill>
+                      <a:prstDash val="solid"/>
+                      <a:round/>
+                      <a:headEnd type="none" w="med" len="med"/>
+                      <a:tailEnd type="none" w="med" len="med"/>
+                    </a:lnL>
+                    <a:lnR w="6350" cap="flat" cmpd="sng" algn="ctr">
+                      <a:solidFill>
+                        <a:srgbClr val="000000"/>
+                      </a:solidFill>
+                      <a:prstDash val="solid"/>
+                      <a:round/>
+                      <a:headEnd type="none" w="med" len="med"/>
+                      <a:tailEnd type="none" w="med" len="med"/>
+                    </a:lnR>
+                    <a:lnT w="6350" cap="flat" cmpd="sng" algn="ctr">
+                      <a:solidFill>
+                        <a:srgbClr val="000000"/>
+                      </a:solidFill>
+                      <a:prstDash val="solid"/>
+                      <a:round/>
+                      <a:headEnd type="none" w="med" len="med"/>
+                      <a:tailEnd type="none" w="med" len="med"/>
+                    </a:lnT>
+                    <a:lnB w="6350" cap="flat" cmpd="sng" algn="ctr">
+                      <a:solidFill>
+                        <a:srgbClr val="000000"/>
+                      </a:solidFill>
+                      <a:prstDash val="solid"/>
+                      <a:round/>
+                      <a:headEnd type="none" w="med" len="med"/>
+                      <a:tailEnd type="none" w="med" len="med"/>
+                    </a:lnB>
+                  </a:tcPr>
+                </a:tc>
+                <a:extLst>
+                  <a:ext uri="{0D108BD9-81ED-4DB2-BD59-A6C34878D82A}">
+                    <a16:rowId xmlns:a16="http://schemas.microsoft.com/office/drawing/2014/main" val="1294997146"/>
+                  </a:ext>
+                </a:extLst>
+              </a:tr>
+              <a:tr h="421322">
+                <a:tc>
+                  <a:txBody>
+                    <a:bodyPr/>
+                    <a:lstStyle/>
+                    <a:p>
+                      <a:pPr algn="ctr" fontAlgn="ctr"/>
+                      <a:r>
+                        <a:rPr lang="ru-RU" sz="1000" b="1" i="0" u="none" strike="noStrike">
+                          <a:solidFill>
+                            <a:srgbClr val="000000"/>
+                          </a:solidFill>
+                          <a:effectLst/>
+                          <a:latin typeface="Times New Roman" panose="02020603050405020304" pitchFamily="18" charset="0"/>
+                        </a:rPr>
+                        <a:t>Назначение</a:t>
+                      </a:r>
+                    </a:p>
+                  </a:txBody>
+                  <a:tcPr marL="7124" marR="7124" marT="7124" marB="0" anchor="ctr">
+                    <a:lnL w="6350" cap="flat" cmpd="sng" algn="ctr">
+                      <a:solidFill>
+                        <a:srgbClr val="000000"/>
+                      </a:solidFill>
+                      <a:prstDash val="solid"/>
+                      <a:round/>
+                      <a:headEnd type="none" w="med" len="med"/>
+                      <a:tailEnd type="none" w="med" len="med"/>
+                    </a:lnL>
+                    <a:lnR w="6350" cap="flat" cmpd="sng" algn="ctr">
+                      <a:solidFill>
+                        <a:srgbClr val="000000"/>
+                      </a:solidFill>
+                      <a:prstDash val="solid"/>
+                      <a:round/>
+                      <a:headEnd type="none" w="med" len="med"/>
+                      <a:tailEnd type="none" w="med" len="med"/>
+                    </a:lnR>
+                    <a:lnT w="6350" cap="flat" cmpd="sng" algn="ctr">
+                      <a:solidFill>
+                        <a:srgbClr val="000000"/>
+                      </a:solidFill>
+                      <a:prstDash val="solid"/>
+                      <a:round/>
+                      <a:headEnd type="none" w="med" len="med"/>
+                      <a:tailEnd type="none" w="med" len="med"/>
+                    </a:lnT>
+                    <a:lnB w="6350" cap="flat" cmpd="sng" algn="ctr">
+                      <a:solidFill>
+                        <a:srgbClr val="000000"/>
+                      </a:solidFill>
+                      <a:prstDash val="solid"/>
+                      <a:round/>
+                      <a:headEnd type="none" w="med" len="med"/>
+                      <a:tailEnd type="none" w="med" len="med"/>
+                    </a:lnB>
+                  </a:tcPr>
+                </a:tc>
+                <a:tc>
+                  <a:txBody>
+                    <a:bodyPr/>
+                    <a:lstStyle/>
+                    <a:p>
+                      <a:pPr algn="ctr" fontAlgn="ctr"/>
+                      <a:r>
+                        <a:rPr lang="ru-RU" sz="900" b="0" i="0" u="none" strike="noStrike">
+                          <a:solidFill>
+                            <a:srgbClr val="000000"/>
+                          </a:solidFill>
+                          <a:effectLst/>
+                          <a:latin typeface="Times New Roman" panose="02020603050405020304" pitchFamily="18" charset="0"/>
+                        </a:rPr>
+                        <a:t>Оптимизация выполнения часто используемых запросов</a:t>
+                      </a:r>
+                    </a:p>
+                  </a:txBody>
+                  <a:tcPr marL="7124" marR="7124" marT="7124" marB="0" anchor="ctr">
+                    <a:lnL w="6350" cap="flat" cmpd="sng" algn="ctr">
+                      <a:solidFill>
+                        <a:srgbClr val="000000"/>
+                      </a:solidFill>
+                      <a:prstDash val="solid"/>
+                      <a:round/>
+                      <a:headEnd type="none" w="med" len="med"/>
+                      <a:tailEnd type="none" w="med" len="med"/>
+                    </a:lnL>
+                    <a:lnR w="6350" cap="flat" cmpd="sng" algn="ctr">
+                      <a:solidFill>
+                        <a:srgbClr val="000000"/>
+                      </a:solidFill>
+                      <a:prstDash val="solid"/>
+                      <a:round/>
+                      <a:headEnd type="none" w="med" len="med"/>
+                      <a:tailEnd type="none" w="med" len="med"/>
+                    </a:lnR>
+                    <a:lnT w="6350" cap="flat" cmpd="sng" algn="ctr">
+                      <a:solidFill>
+                        <a:srgbClr val="000000"/>
+                      </a:solidFill>
+                      <a:prstDash val="solid"/>
+                      <a:round/>
+                      <a:headEnd type="none" w="med" len="med"/>
+                      <a:tailEnd type="none" w="med" len="med"/>
+                    </a:lnT>
+                    <a:lnB w="6350" cap="flat" cmpd="sng" algn="ctr">
+                      <a:solidFill>
+                        <a:srgbClr val="000000"/>
+                      </a:solidFill>
+                      <a:prstDash val="solid"/>
+                      <a:round/>
+                      <a:headEnd type="none" w="med" len="med"/>
+                      <a:tailEnd type="none" w="med" len="med"/>
+                    </a:lnB>
+                  </a:tcPr>
+                </a:tc>
+                <a:tc>
+                  <a:txBody>
+                    <a:bodyPr/>
+                    <a:lstStyle/>
+                    <a:p>
+                      <a:pPr algn="ctr" fontAlgn="ctr"/>
+                      <a:r>
+                        <a:rPr lang="ru-RU" sz="900" b="0" i="0" u="none" strike="noStrike">
+                          <a:solidFill>
+                            <a:srgbClr val="000000"/>
+                          </a:solidFill>
+                          <a:effectLst/>
+                          <a:latin typeface="Times New Roman" panose="02020603050405020304" pitchFamily="18" charset="0"/>
+                        </a:rPr>
+                        <a:t>Виртуальная таблица на основе SELECT-запроса</a:t>
+                      </a:r>
+                    </a:p>
+                  </a:txBody>
+                  <a:tcPr marL="7124" marR="7124" marT="7124" marB="0" anchor="ctr">
+                    <a:lnL w="6350" cap="flat" cmpd="sng" algn="ctr">
+                      <a:solidFill>
+                        <a:srgbClr val="000000"/>
+                      </a:solidFill>
+                      <a:prstDash val="solid"/>
+                      <a:round/>
+                      <a:headEnd type="none" w="med" len="med"/>
+                      <a:tailEnd type="none" w="med" len="med"/>
+                    </a:lnL>
+                    <a:lnR w="6350" cap="flat" cmpd="sng" algn="ctr">
+                      <a:solidFill>
+                        <a:srgbClr val="000000"/>
+                      </a:solidFill>
+                      <a:prstDash val="solid"/>
+                      <a:round/>
+                      <a:headEnd type="none" w="med" len="med"/>
+                      <a:tailEnd type="none" w="med" len="med"/>
+                    </a:lnR>
+                    <a:lnT w="6350" cap="flat" cmpd="sng" algn="ctr">
+                      <a:solidFill>
+                        <a:srgbClr val="000000"/>
+                      </a:solidFill>
+                      <a:prstDash val="solid"/>
+                      <a:round/>
+                      <a:headEnd type="none" w="med" len="med"/>
+                      <a:tailEnd type="none" w="med" len="med"/>
+                    </a:lnT>
+                    <a:lnB w="6350" cap="flat" cmpd="sng" algn="ctr">
+                      <a:solidFill>
+                        <a:srgbClr val="000000"/>
+                      </a:solidFill>
+                      <a:prstDash val="solid"/>
+                      <a:round/>
+                      <a:headEnd type="none" w="med" len="med"/>
+                      <a:tailEnd type="none" w="med" len="med"/>
+                    </a:lnB>
+                  </a:tcPr>
+                </a:tc>
+                <a:tc>
+                  <a:txBody>
+                    <a:bodyPr/>
+                    <a:lstStyle/>
+                    <a:p>
+                      <a:pPr algn="ctr" fontAlgn="ctr"/>
+                      <a:r>
+                        <a:rPr lang="ru-RU" sz="900" b="0" i="0" u="none" strike="noStrike">
+                          <a:solidFill>
+                            <a:srgbClr val="000000"/>
+                          </a:solidFill>
+                          <a:effectLst/>
+                          <a:latin typeface="Times New Roman" panose="02020603050405020304" pitchFamily="18" charset="0"/>
+                        </a:rPr>
+                        <a:t>Выполнение последовательности команд (часто с DML)</a:t>
+                      </a:r>
+                    </a:p>
+                  </a:txBody>
+                  <a:tcPr marL="7124" marR="7124" marT="7124" marB="0" anchor="ctr">
+                    <a:lnL w="6350" cap="flat" cmpd="sng" algn="ctr">
+                      <a:solidFill>
+                        <a:srgbClr val="000000"/>
+                      </a:solidFill>
+                      <a:prstDash val="solid"/>
+                      <a:round/>
+                      <a:headEnd type="none" w="med" len="med"/>
+                      <a:tailEnd type="none" w="med" len="med"/>
+                    </a:lnL>
+                    <a:lnR w="6350" cap="flat" cmpd="sng" algn="ctr">
+                      <a:solidFill>
+                        <a:srgbClr val="000000"/>
+                      </a:solidFill>
+                      <a:prstDash val="solid"/>
+                      <a:round/>
+                      <a:headEnd type="none" w="med" len="med"/>
+                      <a:tailEnd type="none" w="med" len="med"/>
+                    </a:lnR>
+                    <a:lnT w="6350" cap="flat" cmpd="sng" algn="ctr">
+                      <a:solidFill>
+                        <a:srgbClr val="000000"/>
+                      </a:solidFill>
+                      <a:prstDash val="solid"/>
+                      <a:round/>
+                      <a:headEnd type="none" w="med" len="med"/>
+                      <a:tailEnd type="none" w="med" len="med"/>
+                    </a:lnT>
+                    <a:lnB w="6350" cap="flat" cmpd="sng" algn="ctr">
+                      <a:solidFill>
+                        <a:srgbClr val="000000"/>
+                      </a:solidFill>
+                      <a:prstDash val="solid"/>
+                      <a:round/>
+                      <a:headEnd type="none" w="med" len="med"/>
+                      <a:tailEnd type="none" w="med" len="med"/>
+                    </a:lnB>
+                  </a:tcPr>
+                </a:tc>
+                <a:tc>
+                  <a:txBody>
+                    <a:bodyPr/>
+                    <a:lstStyle/>
+                    <a:p>
+                      <a:pPr algn="ctr" fontAlgn="ctr"/>
+                      <a:r>
+                        <a:rPr lang="ru-RU" sz="900" b="0" i="0" u="none" strike="noStrike">
+                          <a:solidFill>
+                            <a:srgbClr val="000000"/>
+                          </a:solidFill>
+                          <a:effectLst/>
+                          <a:latin typeface="Times New Roman" panose="02020603050405020304" pitchFamily="18" charset="0"/>
+                        </a:rPr>
+                        <a:t>Возврат значения(й); могут использоваться в SQL-выражениях</a:t>
+                      </a:r>
+                    </a:p>
+                  </a:txBody>
+                  <a:tcPr marL="7124" marR="7124" marT="7124" marB="0" anchor="ctr">
+                    <a:lnL w="6350" cap="flat" cmpd="sng" algn="ctr">
+                      <a:solidFill>
+                        <a:srgbClr val="000000"/>
+                      </a:solidFill>
+                      <a:prstDash val="solid"/>
+                      <a:round/>
+                      <a:headEnd type="none" w="med" len="med"/>
+                      <a:tailEnd type="none" w="med" len="med"/>
+                    </a:lnL>
+                    <a:lnR w="6350" cap="flat" cmpd="sng" algn="ctr">
+                      <a:solidFill>
+                        <a:srgbClr val="000000"/>
+                      </a:solidFill>
+                      <a:prstDash val="solid"/>
+                      <a:round/>
+                      <a:headEnd type="none" w="med" len="med"/>
+                      <a:tailEnd type="none" w="med" len="med"/>
+                    </a:lnR>
+                    <a:lnT w="6350" cap="flat" cmpd="sng" algn="ctr">
+                      <a:solidFill>
+                        <a:srgbClr val="000000"/>
+                      </a:solidFill>
+                      <a:prstDash val="solid"/>
+                      <a:round/>
+                      <a:headEnd type="none" w="med" len="med"/>
+                      <a:tailEnd type="none" w="med" len="med"/>
+                    </a:lnT>
+                    <a:lnB w="6350" cap="flat" cmpd="sng" algn="ctr">
+                      <a:solidFill>
+                        <a:srgbClr val="000000"/>
+                      </a:solidFill>
+                      <a:prstDash val="solid"/>
+                      <a:round/>
+                      <a:headEnd type="none" w="med" len="med"/>
+                      <a:tailEnd type="none" w="med" len="med"/>
+                    </a:lnB>
+                  </a:tcPr>
+                </a:tc>
+                <a:extLst>
+                  <a:ext uri="{0D108BD9-81ED-4DB2-BD59-A6C34878D82A}">
+                    <a16:rowId xmlns:a16="http://schemas.microsoft.com/office/drawing/2014/main" val="1085038389"/>
+                  </a:ext>
+                </a:extLst>
+              </a:tr>
+              <a:tr h="393234">
+                <a:tc>
+                  <a:txBody>
+                    <a:bodyPr/>
+                    <a:lstStyle/>
+                    <a:p>
+                      <a:pPr algn="ctr" fontAlgn="ctr"/>
+                      <a:r>
+                        <a:rPr lang="ru-RU" sz="1000" b="1" i="0" u="none" strike="noStrike">
+                          <a:solidFill>
+                            <a:srgbClr val="000000"/>
+                          </a:solidFill>
+                          <a:effectLst/>
+                          <a:latin typeface="Times New Roman" panose="02020603050405020304" pitchFamily="18" charset="0"/>
+                        </a:rPr>
+                        <a:t>Хранение в БД</a:t>
+                      </a:r>
+                    </a:p>
+                  </a:txBody>
+                  <a:tcPr marL="7124" marR="7124" marT="7124" marB="0" anchor="ctr">
+                    <a:lnL w="6350" cap="flat" cmpd="sng" algn="ctr">
+                      <a:solidFill>
+                        <a:srgbClr val="000000"/>
+                      </a:solidFill>
+                      <a:prstDash val="solid"/>
+                      <a:round/>
+                      <a:headEnd type="none" w="med" len="med"/>
+                      <a:tailEnd type="none" w="med" len="med"/>
+                    </a:lnL>
+                    <a:lnR w="6350" cap="flat" cmpd="sng" algn="ctr">
+                      <a:solidFill>
+                        <a:srgbClr val="000000"/>
+                      </a:solidFill>
+                      <a:prstDash val="solid"/>
+                      <a:round/>
+                      <a:headEnd type="none" w="med" len="med"/>
+                      <a:tailEnd type="none" w="med" len="med"/>
+                    </a:lnR>
+                    <a:lnT w="6350" cap="flat" cmpd="sng" algn="ctr">
+                      <a:solidFill>
+                        <a:srgbClr val="000000"/>
+                      </a:solidFill>
+                      <a:prstDash val="solid"/>
+                      <a:round/>
+                      <a:headEnd type="none" w="med" len="med"/>
+                      <a:tailEnd type="none" w="med" len="med"/>
+                    </a:lnT>
+                    <a:lnB w="6350" cap="flat" cmpd="sng" algn="ctr">
+                      <a:solidFill>
+                        <a:srgbClr val="000000"/>
+                      </a:solidFill>
+                      <a:prstDash val="solid"/>
+                      <a:round/>
+                      <a:headEnd type="none" w="med" len="med"/>
+                      <a:tailEnd type="none" w="med" len="med"/>
+                    </a:lnB>
+                  </a:tcPr>
+                </a:tc>
+                <a:tc>
+                  <a:txBody>
+                    <a:bodyPr/>
+                    <a:lstStyle/>
+                    <a:p>
+                      <a:pPr algn="ctr" fontAlgn="ctr"/>
+                      <a:r>
+                        <a:rPr lang="ru-RU" sz="900" b="0" i="0" u="none" strike="noStrike">
+                          <a:solidFill>
+                            <a:srgbClr val="000000"/>
+                          </a:solidFill>
+                          <a:effectLst/>
+                          <a:latin typeface="Times New Roman" panose="02020603050405020304" pitchFamily="18" charset="0"/>
+                        </a:rPr>
+                        <a:t>Временные (до конца сессии или DEALLOCATE)</a:t>
+                      </a:r>
+                    </a:p>
+                  </a:txBody>
+                  <a:tcPr marL="7124" marR="7124" marT="7124" marB="0" anchor="ctr">
+                    <a:lnL w="6350" cap="flat" cmpd="sng" algn="ctr">
+                      <a:solidFill>
+                        <a:srgbClr val="000000"/>
+                      </a:solidFill>
+                      <a:prstDash val="solid"/>
+                      <a:round/>
+                      <a:headEnd type="none" w="med" len="med"/>
+                      <a:tailEnd type="none" w="med" len="med"/>
+                    </a:lnL>
+                    <a:lnR w="6350" cap="flat" cmpd="sng" algn="ctr">
+                      <a:solidFill>
+                        <a:srgbClr val="000000"/>
+                      </a:solidFill>
+                      <a:prstDash val="solid"/>
+                      <a:round/>
+                      <a:headEnd type="none" w="med" len="med"/>
+                      <a:tailEnd type="none" w="med" len="med"/>
+                    </a:lnR>
+                    <a:lnT w="6350" cap="flat" cmpd="sng" algn="ctr">
+                      <a:solidFill>
+                        <a:srgbClr val="000000"/>
+                      </a:solidFill>
+                      <a:prstDash val="solid"/>
+                      <a:round/>
+                      <a:headEnd type="none" w="med" len="med"/>
+                      <a:tailEnd type="none" w="med" len="med"/>
+                    </a:lnT>
+                    <a:lnB w="6350" cap="flat" cmpd="sng" algn="ctr">
+                      <a:solidFill>
+                        <a:srgbClr val="000000"/>
+                      </a:solidFill>
+                      <a:prstDash val="solid"/>
+                      <a:round/>
+                      <a:headEnd type="none" w="med" len="med"/>
+                      <a:tailEnd type="none" w="med" len="med"/>
+                    </a:lnB>
+                  </a:tcPr>
+                </a:tc>
+                <a:tc>
+                  <a:txBody>
+                    <a:bodyPr/>
+                    <a:lstStyle/>
+                    <a:p>
+                      <a:pPr algn="ctr" fontAlgn="ctr"/>
+                      <a:r>
+                        <a:rPr lang="ru-RU" sz="900" b="0" i="0" u="none" strike="noStrike">
+                          <a:solidFill>
+                            <a:srgbClr val="000000"/>
+                          </a:solidFill>
+                          <a:effectLst/>
+                          <a:latin typeface="Times New Roman" panose="02020603050405020304" pitchFamily="18" charset="0"/>
+                        </a:rPr>
+                        <a:t>Постоянные (до </a:t>
+                      </a:r>
+                      <a:r>
+                        <a:rPr lang="en-US" sz="900" b="0" i="0" u="none" strike="noStrike">
+                          <a:solidFill>
+                            <a:srgbClr val="000000"/>
+                          </a:solidFill>
+                          <a:effectLst/>
+                          <a:latin typeface="Times New Roman" panose="02020603050405020304" pitchFamily="18" charset="0"/>
+                        </a:rPr>
+                        <a:t>DROP VIEW)</a:t>
+                      </a:r>
+                    </a:p>
+                  </a:txBody>
+                  <a:tcPr marL="7124" marR="7124" marT="7124" marB="0" anchor="ctr">
+                    <a:lnL w="6350" cap="flat" cmpd="sng" algn="ctr">
+                      <a:solidFill>
+                        <a:srgbClr val="000000"/>
+                      </a:solidFill>
+                      <a:prstDash val="solid"/>
+                      <a:round/>
+                      <a:headEnd type="none" w="med" len="med"/>
+                      <a:tailEnd type="none" w="med" len="med"/>
+                    </a:lnL>
+                    <a:lnR w="6350" cap="flat" cmpd="sng" algn="ctr">
+                      <a:solidFill>
+                        <a:srgbClr val="000000"/>
+                      </a:solidFill>
+                      <a:prstDash val="solid"/>
+                      <a:round/>
+                      <a:headEnd type="none" w="med" len="med"/>
+                      <a:tailEnd type="none" w="med" len="med"/>
+                    </a:lnR>
+                    <a:lnT w="6350" cap="flat" cmpd="sng" algn="ctr">
+                      <a:solidFill>
+                        <a:srgbClr val="000000"/>
+                      </a:solidFill>
+                      <a:prstDash val="solid"/>
+                      <a:round/>
+                      <a:headEnd type="none" w="med" len="med"/>
+                      <a:tailEnd type="none" w="med" len="med"/>
+                    </a:lnT>
+                    <a:lnB w="6350" cap="flat" cmpd="sng" algn="ctr">
+                      <a:solidFill>
+                        <a:srgbClr val="000000"/>
+                      </a:solidFill>
+                      <a:prstDash val="solid"/>
+                      <a:round/>
+                      <a:headEnd type="none" w="med" len="med"/>
+                      <a:tailEnd type="none" w="med" len="med"/>
+                    </a:lnB>
+                  </a:tcPr>
+                </a:tc>
+                <a:tc>
+                  <a:txBody>
+                    <a:bodyPr/>
+                    <a:lstStyle/>
+                    <a:p>
+                      <a:pPr algn="ctr" fontAlgn="ctr"/>
+                      <a:r>
+                        <a:rPr lang="ru-RU" sz="900" b="0" i="0" u="none" strike="noStrike">
+                          <a:solidFill>
+                            <a:srgbClr val="000000"/>
+                          </a:solidFill>
+                          <a:effectLst/>
+                          <a:latin typeface="Times New Roman" panose="02020603050405020304" pitchFamily="18" charset="0"/>
+                        </a:rPr>
+                        <a:t>Постоянные (до </a:t>
+                      </a:r>
+                      <a:r>
+                        <a:rPr lang="en-US" sz="900" b="0" i="0" u="none" strike="noStrike">
+                          <a:solidFill>
+                            <a:srgbClr val="000000"/>
+                          </a:solidFill>
+                          <a:effectLst/>
+                          <a:latin typeface="Times New Roman" panose="02020603050405020304" pitchFamily="18" charset="0"/>
+                        </a:rPr>
+                        <a:t>DROP PROCEDURE)</a:t>
+                      </a:r>
+                    </a:p>
+                  </a:txBody>
+                  <a:tcPr marL="7124" marR="7124" marT="7124" marB="0" anchor="ctr">
+                    <a:lnL w="6350" cap="flat" cmpd="sng" algn="ctr">
+                      <a:solidFill>
+                        <a:srgbClr val="000000"/>
+                      </a:solidFill>
+                      <a:prstDash val="solid"/>
+                      <a:round/>
+                      <a:headEnd type="none" w="med" len="med"/>
+                      <a:tailEnd type="none" w="med" len="med"/>
+                    </a:lnL>
+                    <a:lnR w="6350" cap="flat" cmpd="sng" algn="ctr">
+                      <a:solidFill>
+                        <a:srgbClr val="000000"/>
+                      </a:solidFill>
+                      <a:prstDash val="solid"/>
+                      <a:round/>
+                      <a:headEnd type="none" w="med" len="med"/>
+                      <a:tailEnd type="none" w="med" len="med"/>
+                    </a:lnR>
+                    <a:lnT w="6350" cap="flat" cmpd="sng" algn="ctr">
+                      <a:solidFill>
+                        <a:srgbClr val="000000"/>
+                      </a:solidFill>
+                      <a:prstDash val="solid"/>
+                      <a:round/>
+                      <a:headEnd type="none" w="med" len="med"/>
+                      <a:tailEnd type="none" w="med" len="med"/>
+                    </a:lnT>
+                    <a:lnB w="6350" cap="flat" cmpd="sng" algn="ctr">
+                      <a:solidFill>
+                        <a:srgbClr val="000000"/>
+                      </a:solidFill>
+                      <a:prstDash val="solid"/>
+                      <a:round/>
+                      <a:headEnd type="none" w="med" len="med"/>
+                      <a:tailEnd type="none" w="med" len="med"/>
+                    </a:lnB>
+                  </a:tcPr>
+                </a:tc>
+                <a:tc>
+                  <a:txBody>
+                    <a:bodyPr/>
+                    <a:lstStyle/>
+                    <a:p>
+                      <a:pPr algn="ctr" fontAlgn="ctr"/>
+                      <a:r>
+                        <a:rPr lang="ru-RU" sz="900" b="0" i="0" u="none" strike="noStrike">
+                          <a:solidFill>
+                            <a:srgbClr val="000000"/>
+                          </a:solidFill>
+                          <a:effectLst/>
+                          <a:latin typeface="Times New Roman" panose="02020603050405020304" pitchFamily="18" charset="0"/>
+                        </a:rPr>
+                        <a:t>Постоянные (до </a:t>
+                      </a:r>
+                      <a:r>
+                        <a:rPr lang="en-US" sz="900" b="0" i="0" u="none" strike="noStrike">
+                          <a:solidFill>
+                            <a:srgbClr val="000000"/>
+                          </a:solidFill>
+                          <a:effectLst/>
+                          <a:latin typeface="Times New Roman" panose="02020603050405020304" pitchFamily="18" charset="0"/>
+                        </a:rPr>
+                        <a:t>DROP FUNCTION)</a:t>
+                      </a:r>
+                    </a:p>
+                  </a:txBody>
+                  <a:tcPr marL="7124" marR="7124" marT="7124" marB="0" anchor="ctr">
+                    <a:lnL w="6350" cap="flat" cmpd="sng" algn="ctr">
+                      <a:solidFill>
+                        <a:srgbClr val="000000"/>
+                      </a:solidFill>
+                      <a:prstDash val="solid"/>
+                      <a:round/>
+                      <a:headEnd type="none" w="med" len="med"/>
+                      <a:tailEnd type="none" w="med" len="med"/>
+                    </a:lnL>
+                    <a:lnR w="6350" cap="flat" cmpd="sng" algn="ctr">
+                      <a:solidFill>
+                        <a:srgbClr val="000000"/>
+                      </a:solidFill>
+                      <a:prstDash val="solid"/>
+                      <a:round/>
+                      <a:headEnd type="none" w="med" len="med"/>
+                      <a:tailEnd type="none" w="med" len="med"/>
+                    </a:lnR>
+                    <a:lnT w="6350" cap="flat" cmpd="sng" algn="ctr">
+                      <a:solidFill>
+                        <a:srgbClr val="000000"/>
+                      </a:solidFill>
+                      <a:prstDash val="solid"/>
+                      <a:round/>
+                      <a:headEnd type="none" w="med" len="med"/>
+                      <a:tailEnd type="none" w="med" len="med"/>
+                    </a:lnT>
+                    <a:lnB w="6350" cap="flat" cmpd="sng" algn="ctr">
+                      <a:solidFill>
+                        <a:srgbClr val="000000"/>
+                      </a:solidFill>
+                      <a:prstDash val="solid"/>
+                      <a:round/>
+                      <a:headEnd type="none" w="med" len="med"/>
+                      <a:tailEnd type="none" w="med" len="med"/>
+                    </a:lnB>
+                  </a:tcPr>
+                </a:tc>
+                <a:extLst>
+                  <a:ext uri="{0D108BD9-81ED-4DB2-BD59-A6C34878D82A}">
+                    <a16:rowId xmlns:a16="http://schemas.microsoft.com/office/drawing/2014/main" val="3351519470"/>
+                  </a:ext>
+                </a:extLst>
+              </a:tr>
+              <a:tr h="786468">
+                <a:tc>
+                  <a:txBody>
+                    <a:bodyPr/>
+                    <a:lstStyle/>
+                    <a:p>
+                      <a:pPr algn="ctr" fontAlgn="ctr"/>
+                      <a:r>
+                        <a:rPr lang="ru-RU" sz="1000" b="1" i="0" u="none" strike="noStrike">
+                          <a:solidFill>
+                            <a:srgbClr val="000000"/>
+                          </a:solidFill>
+                          <a:effectLst/>
+                          <a:latin typeface="Times New Roman" panose="02020603050405020304" pitchFamily="18" charset="0"/>
+                        </a:rPr>
+                        <a:t>Параметры</a:t>
+                      </a:r>
+                    </a:p>
+                  </a:txBody>
+                  <a:tcPr marL="7124" marR="7124" marT="7124" marB="0" anchor="ctr">
+                    <a:lnL w="6350" cap="flat" cmpd="sng" algn="ctr">
+                      <a:solidFill>
+                        <a:srgbClr val="000000"/>
+                      </a:solidFill>
+                      <a:prstDash val="solid"/>
+                      <a:round/>
+                      <a:headEnd type="none" w="med" len="med"/>
+                      <a:tailEnd type="none" w="med" len="med"/>
+                    </a:lnL>
+                    <a:lnR w="6350" cap="flat" cmpd="sng" algn="ctr">
+                      <a:solidFill>
+                        <a:srgbClr val="000000"/>
+                      </a:solidFill>
+                      <a:prstDash val="solid"/>
+                      <a:round/>
+                      <a:headEnd type="none" w="med" len="med"/>
+                      <a:tailEnd type="none" w="med" len="med"/>
+                    </a:lnR>
+                    <a:lnT w="6350" cap="flat" cmpd="sng" algn="ctr">
+                      <a:solidFill>
+                        <a:srgbClr val="000000"/>
+                      </a:solidFill>
+                      <a:prstDash val="solid"/>
+                      <a:round/>
+                      <a:headEnd type="none" w="med" len="med"/>
+                      <a:tailEnd type="none" w="med" len="med"/>
+                    </a:lnT>
+                    <a:lnB w="6350" cap="flat" cmpd="sng" algn="ctr">
+                      <a:solidFill>
+                        <a:srgbClr val="000000"/>
+                      </a:solidFill>
+                      <a:prstDash val="solid"/>
+                      <a:round/>
+                      <a:headEnd type="none" w="med" len="med"/>
+                      <a:tailEnd type="none" w="med" len="med"/>
+                    </a:lnB>
+                  </a:tcPr>
+                </a:tc>
+                <a:tc>
+                  <a:txBody>
+                    <a:bodyPr/>
+                    <a:lstStyle/>
+                    <a:p>
+                      <a:pPr algn="ctr" fontAlgn="ctr"/>
+                      <a:r>
+                        <a:rPr lang="ru-RU" sz="900" b="0" i="0" u="none" strike="noStrike">
+                          <a:solidFill>
+                            <a:srgbClr val="000000"/>
+                          </a:solidFill>
+                          <a:effectLst/>
+                          <a:latin typeface="Times New Roman" panose="02020603050405020304" pitchFamily="18" charset="0"/>
+                        </a:rPr>
+                        <a:t>Да (при </a:t>
+                      </a:r>
+                      <a:r>
+                        <a:rPr lang="en-US" sz="900" b="0" i="0" u="none" strike="noStrike">
+                          <a:solidFill>
+                            <a:srgbClr val="000000"/>
+                          </a:solidFill>
+                          <a:effectLst/>
+                          <a:latin typeface="Times New Roman" panose="02020603050405020304" pitchFamily="18" charset="0"/>
+                        </a:rPr>
+                        <a:t>EXECUTE)</a:t>
+                      </a:r>
+                    </a:p>
+                  </a:txBody>
+                  <a:tcPr marL="7124" marR="7124" marT="7124" marB="0" anchor="ctr">
+                    <a:lnL w="6350" cap="flat" cmpd="sng" algn="ctr">
+                      <a:solidFill>
+                        <a:srgbClr val="000000"/>
+                      </a:solidFill>
+                      <a:prstDash val="solid"/>
+                      <a:round/>
+                      <a:headEnd type="none" w="med" len="med"/>
+                      <a:tailEnd type="none" w="med" len="med"/>
+                    </a:lnL>
+                    <a:lnR w="6350" cap="flat" cmpd="sng" algn="ctr">
+                      <a:solidFill>
+                        <a:srgbClr val="000000"/>
+                      </a:solidFill>
+                      <a:prstDash val="solid"/>
+                      <a:round/>
+                      <a:headEnd type="none" w="med" len="med"/>
+                      <a:tailEnd type="none" w="med" len="med"/>
+                    </a:lnR>
+                    <a:lnT w="6350" cap="flat" cmpd="sng" algn="ctr">
+                      <a:solidFill>
+                        <a:srgbClr val="000000"/>
+                      </a:solidFill>
+                      <a:prstDash val="solid"/>
+                      <a:round/>
+                      <a:headEnd type="none" w="med" len="med"/>
+                      <a:tailEnd type="none" w="med" len="med"/>
+                    </a:lnT>
+                    <a:lnB w="6350" cap="flat" cmpd="sng" algn="ctr">
+                      <a:solidFill>
+                        <a:srgbClr val="000000"/>
+                      </a:solidFill>
+                      <a:prstDash val="solid"/>
+                      <a:round/>
+                      <a:headEnd type="none" w="med" len="med"/>
+                      <a:tailEnd type="none" w="med" len="med"/>
+                    </a:lnB>
+                  </a:tcPr>
+                </a:tc>
+                <a:tc>
+                  <a:txBody>
+                    <a:bodyPr/>
+                    <a:lstStyle/>
+                    <a:p>
+                      <a:pPr algn="ctr" fontAlgn="ctr"/>
+                      <a:r>
+                        <a:rPr lang="ru-RU" sz="900" b="0" i="0" u="none" strike="noStrike">
+                          <a:solidFill>
+                            <a:srgbClr val="000000"/>
+                          </a:solidFill>
+                          <a:effectLst/>
+                          <a:latin typeface="Times New Roman" panose="02020603050405020304" pitchFamily="18" charset="0"/>
+                        </a:rPr>
+                        <a:t>Нет (но можно использовать материализованные параметризованные view через функции)</a:t>
+                      </a:r>
+                    </a:p>
+                  </a:txBody>
+                  <a:tcPr marL="7124" marR="7124" marT="7124" marB="0" anchor="ctr">
+                    <a:lnL w="6350" cap="flat" cmpd="sng" algn="ctr">
+                      <a:solidFill>
+                        <a:srgbClr val="000000"/>
+                      </a:solidFill>
+                      <a:prstDash val="solid"/>
+                      <a:round/>
+                      <a:headEnd type="none" w="med" len="med"/>
+                      <a:tailEnd type="none" w="med" len="med"/>
+                    </a:lnL>
+                    <a:lnR w="6350" cap="flat" cmpd="sng" algn="ctr">
+                      <a:solidFill>
+                        <a:srgbClr val="000000"/>
+                      </a:solidFill>
+                      <a:prstDash val="solid"/>
+                      <a:round/>
+                      <a:headEnd type="none" w="med" len="med"/>
+                      <a:tailEnd type="none" w="med" len="med"/>
+                    </a:lnR>
+                    <a:lnT w="6350" cap="flat" cmpd="sng" algn="ctr">
+                      <a:solidFill>
+                        <a:srgbClr val="000000"/>
+                      </a:solidFill>
+                      <a:prstDash val="solid"/>
+                      <a:round/>
+                      <a:headEnd type="none" w="med" len="med"/>
+                      <a:tailEnd type="none" w="med" len="med"/>
+                    </a:lnT>
+                    <a:lnB w="6350" cap="flat" cmpd="sng" algn="ctr">
+                      <a:solidFill>
+                        <a:srgbClr val="000000"/>
+                      </a:solidFill>
+                      <a:prstDash val="solid"/>
+                      <a:round/>
+                      <a:headEnd type="none" w="med" len="med"/>
+                      <a:tailEnd type="none" w="med" len="med"/>
+                    </a:lnB>
+                  </a:tcPr>
+                </a:tc>
+                <a:tc>
+                  <a:txBody>
+                    <a:bodyPr/>
+                    <a:lstStyle/>
+                    <a:p>
+                      <a:pPr algn="ctr" fontAlgn="ctr"/>
+                      <a:r>
+                        <a:rPr lang="ru-RU" sz="900" b="0" i="0" u="none" strike="noStrike">
+                          <a:solidFill>
+                            <a:srgbClr val="000000"/>
+                          </a:solidFill>
+                          <a:effectLst/>
+                          <a:latin typeface="Times New Roman" panose="02020603050405020304" pitchFamily="18" charset="0"/>
+                        </a:rPr>
+                        <a:t>Да</a:t>
+                      </a:r>
+                    </a:p>
+                  </a:txBody>
+                  <a:tcPr marL="7124" marR="7124" marT="7124" marB="0" anchor="ctr">
+                    <a:lnL w="6350" cap="flat" cmpd="sng" algn="ctr">
+                      <a:solidFill>
+                        <a:srgbClr val="000000"/>
+                      </a:solidFill>
+                      <a:prstDash val="solid"/>
+                      <a:round/>
+                      <a:headEnd type="none" w="med" len="med"/>
+                      <a:tailEnd type="none" w="med" len="med"/>
+                    </a:lnL>
+                    <a:lnR w="6350" cap="flat" cmpd="sng" algn="ctr">
+                      <a:solidFill>
+                        <a:srgbClr val="000000"/>
+                      </a:solidFill>
+                      <a:prstDash val="solid"/>
+                      <a:round/>
+                      <a:headEnd type="none" w="med" len="med"/>
+                      <a:tailEnd type="none" w="med" len="med"/>
+                    </a:lnR>
+                    <a:lnT w="6350" cap="flat" cmpd="sng" algn="ctr">
+                      <a:solidFill>
+                        <a:srgbClr val="000000"/>
+                      </a:solidFill>
+                      <a:prstDash val="solid"/>
+                      <a:round/>
+                      <a:headEnd type="none" w="med" len="med"/>
+                      <a:tailEnd type="none" w="med" len="med"/>
+                    </a:lnT>
+                    <a:lnB w="6350" cap="flat" cmpd="sng" algn="ctr">
+                      <a:solidFill>
+                        <a:srgbClr val="000000"/>
+                      </a:solidFill>
+                      <a:prstDash val="solid"/>
+                      <a:round/>
+                      <a:headEnd type="none" w="med" len="med"/>
+                      <a:tailEnd type="none" w="med" len="med"/>
+                    </a:lnB>
+                  </a:tcPr>
+                </a:tc>
+                <a:tc>
+                  <a:txBody>
+                    <a:bodyPr/>
+                    <a:lstStyle/>
+                    <a:p>
+                      <a:pPr algn="ctr" fontAlgn="ctr"/>
+                      <a:r>
+                        <a:rPr lang="ru-RU" sz="900" b="0" i="0" u="none" strike="noStrike">
+                          <a:solidFill>
+                            <a:srgbClr val="000000"/>
+                          </a:solidFill>
+                          <a:effectLst/>
+                          <a:latin typeface="Times New Roman" panose="02020603050405020304" pitchFamily="18" charset="0"/>
+                        </a:rPr>
+                        <a:t>Да</a:t>
+                      </a:r>
+                    </a:p>
+                  </a:txBody>
+                  <a:tcPr marL="7124" marR="7124" marT="7124" marB="0" anchor="ctr">
+                    <a:lnL w="6350" cap="flat" cmpd="sng" algn="ctr">
+                      <a:solidFill>
+                        <a:srgbClr val="000000"/>
+                      </a:solidFill>
+                      <a:prstDash val="solid"/>
+                      <a:round/>
+                      <a:headEnd type="none" w="med" len="med"/>
+                      <a:tailEnd type="none" w="med" len="med"/>
+                    </a:lnL>
+                    <a:lnR w="6350" cap="flat" cmpd="sng" algn="ctr">
+                      <a:solidFill>
+                        <a:srgbClr val="000000"/>
+                      </a:solidFill>
+                      <a:prstDash val="solid"/>
+                      <a:round/>
+                      <a:headEnd type="none" w="med" len="med"/>
+                      <a:tailEnd type="none" w="med" len="med"/>
+                    </a:lnR>
+                    <a:lnT w="6350" cap="flat" cmpd="sng" algn="ctr">
+                      <a:solidFill>
+                        <a:srgbClr val="000000"/>
+                      </a:solidFill>
+                      <a:prstDash val="solid"/>
+                      <a:round/>
+                      <a:headEnd type="none" w="med" len="med"/>
+                      <a:tailEnd type="none" w="med" len="med"/>
+                    </a:lnT>
+                    <a:lnB w="6350" cap="flat" cmpd="sng" algn="ctr">
+                      <a:solidFill>
+                        <a:srgbClr val="000000"/>
+                      </a:solidFill>
+                      <a:prstDash val="solid"/>
+                      <a:round/>
+                      <a:headEnd type="none" w="med" len="med"/>
+                      <a:tailEnd type="none" w="med" len="med"/>
+                    </a:lnB>
+                  </a:tcPr>
+                </a:tc>
+                <a:extLst>
+                  <a:ext uri="{0D108BD9-81ED-4DB2-BD59-A6C34878D82A}">
+                    <a16:rowId xmlns:a16="http://schemas.microsoft.com/office/drawing/2014/main" val="354439773"/>
+                  </a:ext>
+                </a:extLst>
+              </a:tr>
+              <a:tr h="393234">
+                <a:tc>
+                  <a:txBody>
+                    <a:bodyPr/>
+                    <a:lstStyle/>
+                    <a:p>
+                      <a:pPr algn="ctr" fontAlgn="ctr"/>
+                      <a:r>
+                        <a:rPr lang="ru-RU" sz="1000" b="1" i="0" u="none" strike="noStrike">
+                          <a:solidFill>
+                            <a:srgbClr val="000000"/>
+                          </a:solidFill>
+                          <a:effectLst/>
+                          <a:latin typeface="Times New Roman" panose="02020603050405020304" pitchFamily="18" charset="0"/>
+                        </a:rPr>
+                        <a:t>Возврат результата</a:t>
+                      </a:r>
+                    </a:p>
+                  </a:txBody>
+                  <a:tcPr marL="7124" marR="7124" marT="7124" marB="0" anchor="ctr">
+                    <a:lnL w="6350" cap="flat" cmpd="sng" algn="ctr">
+                      <a:solidFill>
+                        <a:srgbClr val="000000"/>
+                      </a:solidFill>
+                      <a:prstDash val="solid"/>
+                      <a:round/>
+                      <a:headEnd type="none" w="med" len="med"/>
+                      <a:tailEnd type="none" w="med" len="med"/>
+                    </a:lnL>
+                    <a:lnR w="6350" cap="flat" cmpd="sng" algn="ctr">
+                      <a:solidFill>
+                        <a:srgbClr val="000000"/>
+                      </a:solidFill>
+                      <a:prstDash val="solid"/>
+                      <a:round/>
+                      <a:headEnd type="none" w="med" len="med"/>
+                      <a:tailEnd type="none" w="med" len="med"/>
+                    </a:lnR>
+                    <a:lnT w="6350" cap="flat" cmpd="sng" algn="ctr">
+                      <a:solidFill>
+                        <a:srgbClr val="000000"/>
+                      </a:solidFill>
+                      <a:prstDash val="solid"/>
+                      <a:round/>
+                      <a:headEnd type="none" w="med" len="med"/>
+                      <a:tailEnd type="none" w="med" len="med"/>
+                    </a:lnT>
+                    <a:lnB w="6350" cap="flat" cmpd="sng" algn="ctr">
+                      <a:solidFill>
+                        <a:srgbClr val="000000"/>
+                      </a:solidFill>
+                      <a:prstDash val="solid"/>
+                      <a:round/>
+                      <a:headEnd type="none" w="med" len="med"/>
+                      <a:tailEnd type="none" w="med" len="med"/>
+                    </a:lnB>
+                  </a:tcPr>
+                </a:tc>
+                <a:tc>
+                  <a:txBody>
+                    <a:bodyPr/>
+                    <a:lstStyle/>
+                    <a:p>
+                      <a:pPr algn="ctr" fontAlgn="ctr"/>
+                      <a:r>
+                        <a:rPr lang="ru-RU" sz="900" b="0" i="0" u="none" strike="noStrike">
+                          <a:solidFill>
+                            <a:srgbClr val="000000"/>
+                          </a:solidFill>
+                          <a:effectLst/>
+                          <a:latin typeface="Times New Roman" panose="02020603050405020304" pitchFamily="18" charset="0"/>
+                        </a:rPr>
+                        <a:t>Нет (выполняет запрос)</a:t>
+                      </a:r>
+                    </a:p>
+                  </a:txBody>
+                  <a:tcPr marL="7124" marR="7124" marT="7124" marB="0" anchor="ctr">
+                    <a:lnL w="6350" cap="flat" cmpd="sng" algn="ctr">
+                      <a:solidFill>
+                        <a:srgbClr val="000000"/>
+                      </a:solidFill>
+                      <a:prstDash val="solid"/>
+                      <a:round/>
+                      <a:headEnd type="none" w="med" len="med"/>
+                      <a:tailEnd type="none" w="med" len="med"/>
+                    </a:lnL>
+                    <a:lnR w="6350" cap="flat" cmpd="sng" algn="ctr">
+                      <a:solidFill>
+                        <a:srgbClr val="000000"/>
+                      </a:solidFill>
+                      <a:prstDash val="solid"/>
+                      <a:round/>
+                      <a:headEnd type="none" w="med" len="med"/>
+                      <a:tailEnd type="none" w="med" len="med"/>
+                    </a:lnR>
+                    <a:lnT w="6350" cap="flat" cmpd="sng" algn="ctr">
+                      <a:solidFill>
+                        <a:srgbClr val="000000"/>
+                      </a:solidFill>
+                      <a:prstDash val="solid"/>
+                      <a:round/>
+                      <a:headEnd type="none" w="med" len="med"/>
+                      <a:tailEnd type="none" w="med" len="med"/>
+                    </a:lnT>
+                    <a:lnB w="6350" cap="flat" cmpd="sng" algn="ctr">
+                      <a:solidFill>
+                        <a:srgbClr val="000000"/>
+                      </a:solidFill>
+                      <a:prstDash val="solid"/>
+                      <a:round/>
+                      <a:headEnd type="none" w="med" len="med"/>
+                      <a:tailEnd type="none" w="med" len="med"/>
+                    </a:lnB>
+                  </a:tcPr>
+                </a:tc>
+                <a:tc>
+                  <a:txBody>
+                    <a:bodyPr/>
+                    <a:lstStyle/>
+                    <a:p>
+                      <a:pPr algn="ctr" fontAlgn="ctr"/>
+                      <a:r>
+                        <a:rPr lang="ru-RU" sz="900" b="0" i="0" u="none" strike="noStrike">
+                          <a:solidFill>
+                            <a:srgbClr val="000000"/>
+                          </a:solidFill>
+                          <a:effectLst/>
+                          <a:latin typeface="Times New Roman" panose="02020603050405020304" pitchFamily="18" charset="0"/>
+                        </a:rPr>
+                        <a:t>Да — набор строк (как таблица)</a:t>
+                      </a:r>
+                    </a:p>
+                  </a:txBody>
+                  <a:tcPr marL="7124" marR="7124" marT="7124" marB="0" anchor="ctr">
+                    <a:lnL w="6350" cap="flat" cmpd="sng" algn="ctr">
+                      <a:solidFill>
+                        <a:srgbClr val="000000"/>
+                      </a:solidFill>
+                      <a:prstDash val="solid"/>
+                      <a:round/>
+                      <a:headEnd type="none" w="med" len="med"/>
+                      <a:tailEnd type="none" w="med" len="med"/>
+                    </a:lnL>
+                    <a:lnR w="6350" cap="flat" cmpd="sng" algn="ctr">
+                      <a:solidFill>
+                        <a:srgbClr val="000000"/>
+                      </a:solidFill>
+                      <a:prstDash val="solid"/>
+                      <a:round/>
+                      <a:headEnd type="none" w="med" len="med"/>
+                      <a:tailEnd type="none" w="med" len="med"/>
+                    </a:lnR>
+                    <a:lnT w="6350" cap="flat" cmpd="sng" algn="ctr">
+                      <a:solidFill>
+                        <a:srgbClr val="000000"/>
+                      </a:solidFill>
+                      <a:prstDash val="solid"/>
+                      <a:round/>
+                      <a:headEnd type="none" w="med" len="med"/>
+                      <a:tailEnd type="none" w="med" len="med"/>
+                    </a:lnT>
+                    <a:lnB w="6350" cap="flat" cmpd="sng" algn="ctr">
+                      <a:solidFill>
+                        <a:srgbClr val="000000"/>
+                      </a:solidFill>
+                      <a:prstDash val="solid"/>
+                      <a:round/>
+                      <a:headEnd type="none" w="med" len="med"/>
+                      <a:tailEnd type="none" w="med" len="med"/>
+                    </a:lnB>
+                  </a:tcPr>
+                </a:tc>
+                <a:tc>
+                  <a:txBody>
+                    <a:bodyPr/>
+                    <a:lstStyle/>
+                    <a:p>
+                      <a:pPr algn="ctr" fontAlgn="ctr"/>
+                      <a:r>
+                        <a:rPr lang="ru-RU" sz="900" b="0" i="0" u="none" strike="noStrike">
+                          <a:solidFill>
+                            <a:srgbClr val="000000"/>
+                          </a:solidFill>
+                          <a:effectLst/>
+                          <a:latin typeface="Times New Roman" panose="02020603050405020304" pitchFamily="18" charset="0"/>
+                        </a:rPr>
+                        <a:t>Нет (но можно использовать INOUT/OUT параметры)</a:t>
+                      </a:r>
+                    </a:p>
+                  </a:txBody>
+                  <a:tcPr marL="7124" marR="7124" marT="7124" marB="0" anchor="ctr">
+                    <a:lnL w="6350" cap="flat" cmpd="sng" algn="ctr">
+                      <a:solidFill>
+                        <a:srgbClr val="000000"/>
+                      </a:solidFill>
+                      <a:prstDash val="solid"/>
+                      <a:round/>
+                      <a:headEnd type="none" w="med" len="med"/>
+                      <a:tailEnd type="none" w="med" len="med"/>
+                    </a:lnL>
+                    <a:lnR w="6350" cap="flat" cmpd="sng" algn="ctr">
+                      <a:solidFill>
+                        <a:srgbClr val="000000"/>
+                      </a:solidFill>
+                      <a:prstDash val="solid"/>
+                      <a:round/>
+                      <a:headEnd type="none" w="med" len="med"/>
+                      <a:tailEnd type="none" w="med" len="med"/>
+                    </a:lnR>
+                    <a:lnT w="6350" cap="flat" cmpd="sng" algn="ctr">
+                      <a:solidFill>
+                        <a:srgbClr val="000000"/>
+                      </a:solidFill>
+                      <a:prstDash val="solid"/>
+                      <a:round/>
+                      <a:headEnd type="none" w="med" len="med"/>
+                      <a:tailEnd type="none" w="med" len="med"/>
+                    </a:lnT>
+                    <a:lnB w="6350" cap="flat" cmpd="sng" algn="ctr">
+                      <a:solidFill>
+                        <a:srgbClr val="000000"/>
+                      </a:solidFill>
+                      <a:prstDash val="solid"/>
+                      <a:round/>
+                      <a:headEnd type="none" w="med" len="med"/>
+                      <a:tailEnd type="none" w="med" len="med"/>
+                    </a:lnB>
+                  </a:tcPr>
+                </a:tc>
+                <a:tc>
+                  <a:txBody>
+                    <a:bodyPr/>
+                    <a:lstStyle/>
+                    <a:p>
+                      <a:pPr algn="ctr" fontAlgn="ctr"/>
+                      <a:r>
+                        <a:rPr lang="ru-RU" sz="900" b="0" i="0" u="none" strike="noStrike">
+                          <a:solidFill>
+                            <a:srgbClr val="000000"/>
+                          </a:solidFill>
+                          <a:effectLst/>
+                          <a:latin typeface="Times New Roman" panose="02020603050405020304" pitchFamily="18" charset="0"/>
+                        </a:rPr>
+                        <a:t>Да — скаляр, таблица, SETOF, RECORD и т.д.</a:t>
+                      </a:r>
+                    </a:p>
+                  </a:txBody>
+                  <a:tcPr marL="7124" marR="7124" marT="7124" marB="0" anchor="ctr">
+                    <a:lnL w="6350" cap="flat" cmpd="sng" algn="ctr">
+                      <a:solidFill>
+                        <a:srgbClr val="000000"/>
+                      </a:solidFill>
+                      <a:prstDash val="solid"/>
+                      <a:round/>
+                      <a:headEnd type="none" w="med" len="med"/>
+                      <a:tailEnd type="none" w="med" len="med"/>
+                    </a:lnL>
+                    <a:lnR w="6350" cap="flat" cmpd="sng" algn="ctr">
+                      <a:solidFill>
+                        <a:srgbClr val="000000"/>
+                      </a:solidFill>
+                      <a:prstDash val="solid"/>
+                      <a:round/>
+                      <a:headEnd type="none" w="med" len="med"/>
+                      <a:tailEnd type="none" w="med" len="med"/>
+                    </a:lnR>
+                    <a:lnT w="6350" cap="flat" cmpd="sng" algn="ctr">
+                      <a:solidFill>
+                        <a:srgbClr val="000000"/>
+                      </a:solidFill>
+                      <a:prstDash val="solid"/>
+                      <a:round/>
+                      <a:headEnd type="none" w="med" len="med"/>
+                      <a:tailEnd type="none" w="med" len="med"/>
+                    </a:lnT>
+                    <a:lnB w="6350" cap="flat" cmpd="sng" algn="ctr">
+                      <a:solidFill>
+                        <a:srgbClr val="000000"/>
+                      </a:solidFill>
+                      <a:prstDash val="solid"/>
+                      <a:round/>
+                      <a:headEnd type="none" w="med" len="med"/>
+                      <a:tailEnd type="none" w="med" len="med"/>
+                    </a:lnB>
+                  </a:tcPr>
+                </a:tc>
+                <a:extLst>
+                  <a:ext uri="{0D108BD9-81ED-4DB2-BD59-A6C34878D82A}">
+                    <a16:rowId xmlns:a16="http://schemas.microsoft.com/office/drawing/2014/main" val="1577199416"/>
+                  </a:ext>
+                </a:extLst>
+              </a:tr>
+              <a:tr h="550150">
+                <a:tc>
+                  <a:txBody>
+                    <a:bodyPr/>
+                    <a:lstStyle/>
+                    <a:p>
+                      <a:pPr algn="ctr" fontAlgn="ctr"/>
+                      <a:r>
+                        <a:rPr lang="ru-RU" sz="1000" b="1" i="0" u="none" strike="noStrike">
+                          <a:solidFill>
+                            <a:srgbClr val="000000"/>
+                          </a:solidFill>
+                          <a:effectLst/>
+                          <a:latin typeface="Times New Roman" panose="02020603050405020304" pitchFamily="18" charset="0"/>
+                        </a:rPr>
+                        <a:t>Может содержать </a:t>
+                      </a:r>
+                      <a:r>
+                        <a:rPr lang="en-US" sz="1000" b="1" i="0" u="none" strike="noStrike">
+                          <a:solidFill>
+                            <a:srgbClr val="000000"/>
+                          </a:solidFill>
+                          <a:effectLst/>
+                          <a:latin typeface="Times New Roman" panose="02020603050405020304" pitchFamily="18" charset="0"/>
+                        </a:rPr>
+                        <a:t>DML (INSERT/UPDATE/DELETE)</a:t>
+                      </a:r>
+                    </a:p>
+                  </a:txBody>
+                  <a:tcPr marL="7124" marR="7124" marT="7124" marB="0" anchor="ctr">
+                    <a:lnL w="6350" cap="flat" cmpd="sng" algn="ctr">
+                      <a:solidFill>
+                        <a:srgbClr val="000000"/>
+                      </a:solidFill>
+                      <a:prstDash val="solid"/>
+                      <a:round/>
+                      <a:headEnd type="none" w="med" len="med"/>
+                      <a:tailEnd type="none" w="med" len="med"/>
+                    </a:lnL>
+                    <a:lnR w="6350" cap="flat" cmpd="sng" algn="ctr">
+                      <a:solidFill>
+                        <a:srgbClr val="000000"/>
+                      </a:solidFill>
+                      <a:prstDash val="solid"/>
+                      <a:round/>
+                      <a:headEnd type="none" w="med" len="med"/>
+                      <a:tailEnd type="none" w="med" len="med"/>
+                    </a:lnR>
+                    <a:lnT w="6350" cap="flat" cmpd="sng" algn="ctr">
+                      <a:solidFill>
+                        <a:srgbClr val="000000"/>
+                      </a:solidFill>
+                      <a:prstDash val="solid"/>
+                      <a:round/>
+                      <a:headEnd type="none" w="med" len="med"/>
+                      <a:tailEnd type="none" w="med" len="med"/>
+                    </a:lnT>
+                    <a:lnB w="6350" cap="flat" cmpd="sng" algn="ctr">
+                      <a:solidFill>
+                        <a:srgbClr val="000000"/>
+                      </a:solidFill>
+                      <a:prstDash val="solid"/>
+                      <a:round/>
+                      <a:headEnd type="none" w="med" len="med"/>
+                      <a:tailEnd type="none" w="med" len="med"/>
+                    </a:lnB>
+                  </a:tcPr>
+                </a:tc>
+                <a:tc>
+                  <a:txBody>
+                    <a:bodyPr/>
+                    <a:lstStyle/>
+                    <a:p>
+                      <a:pPr algn="ctr" fontAlgn="ctr"/>
+                      <a:r>
+                        <a:rPr lang="ru-RU" sz="900" b="0" i="0" u="none" strike="noStrike">
+                          <a:solidFill>
+                            <a:srgbClr val="000000"/>
+                          </a:solidFill>
+                          <a:effectLst/>
+                          <a:latin typeface="Times New Roman" panose="02020603050405020304" pitchFamily="18" charset="0"/>
+                        </a:rPr>
+                        <a:t>Нет (только SELECT/INSERT/UPDATE/DELETE как одиночный запрос)</a:t>
+                      </a:r>
+                    </a:p>
+                  </a:txBody>
+                  <a:tcPr marL="7124" marR="7124" marT="7124" marB="0" anchor="ctr">
+                    <a:lnL w="6350" cap="flat" cmpd="sng" algn="ctr">
+                      <a:solidFill>
+                        <a:srgbClr val="000000"/>
+                      </a:solidFill>
+                      <a:prstDash val="solid"/>
+                      <a:round/>
+                      <a:headEnd type="none" w="med" len="med"/>
+                      <a:tailEnd type="none" w="med" len="med"/>
+                    </a:lnL>
+                    <a:lnR w="6350" cap="flat" cmpd="sng" algn="ctr">
+                      <a:solidFill>
+                        <a:srgbClr val="000000"/>
+                      </a:solidFill>
+                      <a:prstDash val="solid"/>
+                      <a:round/>
+                      <a:headEnd type="none" w="med" len="med"/>
+                      <a:tailEnd type="none" w="med" len="med"/>
+                    </a:lnR>
+                    <a:lnT w="6350" cap="flat" cmpd="sng" algn="ctr">
+                      <a:solidFill>
+                        <a:srgbClr val="000000"/>
+                      </a:solidFill>
+                      <a:prstDash val="solid"/>
+                      <a:round/>
+                      <a:headEnd type="none" w="med" len="med"/>
+                      <a:tailEnd type="none" w="med" len="med"/>
+                    </a:lnT>
+                    <a:lnB w="6350" cap="flat" cmpd="sng" algn="ctr">
+                      <a:solidFill>
+                        <a:srgbClr val="000000"/>
+                      </a:solidFill>
+                      <a:prstDash val="solid"/>
+                      <a:round/>
+                      <a:headEnd type="none" w="med" len="med"/>
+                      <a:tailEnd type="none" w="med" len="med"/>
+                    </a:lnB>
+                  </a:tcPr>
+                </a:tc>
+                <a:tc>
+                  <a:txBody>
+                    <a:bodyPr/>
+                    <a:lstStyle/>
+                    <a:p>
+                      <a:pPr algn="ctr" fontAlgn="ctr"/>
+                      <a:r>
+                        <a:rPr lang="ru-RU" sz="900" b="0" i="0" u="none" strike="noStrike">
+                          <a:solidFill>
+                            <a:srgbClr val="000000"/>
+                          </a:solidFill>
+                          <a:effectLst/>
+                          <a:latin typeface="Times New Roman" panose="02020603050405020304" pitchFamily="18" charset="0"/>
+                        </a:rPr>
+                        <a:t>Нет (только </a:t>
+                      </a:r>
+                      <a:r>
+                        <a:rPr lang="en-US" sz="900" b="0" i="0" u="none" strike="noStrike">
+                          <a:solidFill>
+                            <a:srgbClr val="000000"/>
+                          </a:solidFill>
+                          <a:effectLst/>
+                          <a:latin typeface="Times New Roman" panose="02020603050405020304" pitchFamily="18" charset="0"/>
+                        </a:rPr>
+                        <a:t>SELECT)</a:t>
+                      </a:r>
+                    </a:p>
+                  </a:txBody>
+                  <a:tcPr marL="7124" marR="7124" marT="7124" marB="0" anchor="ctr">
+                    <a:lnL w="6350" cap="flat" cmpd="sng" algn="ctr">
+                      <a:solidFill>
+                        <a:srgbClr val="000000"/>
+                      </a:solidFill>
+                      <a:prstDash val="solid"/>
+                      <a:round/>
+                      <a:headEnd type="none" w="med" len="med"/>
+                      <a:tailEnd type="none" w="med" len="med"/>
+                    </a:lnL>
+                    <a:lnR w="6350" cap="flat" cmpd="sng" algn="ctr">
+                      <a:solidFill>
+                        <a:srgbClr val="000000"/>
+                      </a:solidFill>
+                      <a:prstDash val="solid"/>
+                      <a:round/>
+                      <a:headEnd type="none" w="med" len="med"/>
+                      <a:tailEnd type="none" w="med" len="med"/>
+                    </a:lnR>
+                    <a:lnT w="6350" cap="flat" cmpd="sng" algn="ctr">
+                      <a:solidFill>
+                        <a:srgbClr val="000000"/>
+                      </a:solidFill>
+                      <a:prstDash val="solid"/>
+                      <a:round/>
+                      <a:headEnd type="none" w="med" len="med"/>
+                      <a:tailEnd type="none" w="med" len="med"/>
+                    </a:lnT>
+                    <a:lnB w="6350" cap="flat" cmpd="sng" algn="ctr">
+                      <a:solidFill>
+                        <a:srgbClr val="000000"/>
+                      </a:solidFill>
+                      <a:prstDash val="solid"/>
+                      <a:round/>
+                      <a:headEnd type="none" w="med" len="med"/>
+                      <a:tailEnd type="none" w="med" len="med"/>
+                    </a:lnB>
+                  </a:tcPr>
+                </a:tc>
+                <a:tc>
+                  <a:txBody>
+                    <a:bodyPr/>
+                    <a:lstStyle/>
+                    <a:p>
+                      <a:pPr algn="ctr" fontAlgn="ctr"/>
+                      <a:r>
+                        <a:rPr lang="ru-RU" sz="900" b="0" i="0" u="none" strike="noStrike">
+                          <a:solidFill>
+                            <a:srgbClr val="000000"/>
+                          </a:solidFill>
+                          <a:effectLst/>
+                          <a:latin typeface="Times New Roman" panose="02020603050405020304" pitchFamily="18" charset="0"/>
+                        </a:rPr>
+                        <a:t>Да</a:t>
+                      </a:r>
+                    </a:p>
+                  </a:txBody>
+                  <a:tcPr marL="7124" marR="7124" marT="7124" marB="0" anchor="ctr">
+                    <a:lnL w="6350" cap="flat" cmpd="sng" algn="ctr">
+                      <a:solidFill>
+                        <a:srgbClr val="000000"/>
+                      </a:solidFill>
+                      <a:prstDash val="solid"/>
+                      <a:round/>
+                      <a:headEnd type="none" w="med" len="med"/>
+                      <a:tailEnd type="none" w="med" len="med"/>
+                    </a:lnL>
+                    <a:lnR w="6350" cap="flat" cmpd="sng" algn="ctr">
+                      <a:solidFill>
+                        <a:srgbClr val="000000"/>
+                      </a:solidFill>
+                      <a:prstDash val="solid"/>
+                      <a:round/>
+                      <a:headEnd type="none" w="med" len="med"/>
+                      <a:tailEnd type="none" w="med" len="med"/>
+                    </a:lnR>
+                    <a:lnT w="6350" cap="flat" cmpd="sng" algn="ctr">
+                      <a:solidFill>
+                        <a:srgbClr val="000000"/>
+                      </a:solidFill>
+                      <a:prstDash val="solid"/>
+                      <a:round/>
+                      <a:headEnd type="none" w="med" len="med"/>
+                      <a:tailEnd type="none" w="med" len="med"/>
+                    </a:lnT>
+                    <a:lnB w="6350" cap="flat" cmpd="sng" algn="ctr">
+                      <a:solidFill>
+                        <a:srgbClr val="000000"/>
+                      </a:solidFill>
+                      <a:prstDash val="solid"/>
+                      <a:round/>
+                      <a:headEnd type="none" w="med" len="med"/>
+                      <a:tailEnd type="none" w="med" len="med"/>
+                    </a:lnB>
+                  </a:tcPr>
+                </a:tc>
+                <a:tc>
+                  <a:txBody>
+                    <a:bodyPr/>
+                    <a:lstStyle/>
+                    <a:p>
+                      <a:pPr algn="ctr" fontAlgn="ctr"/>
+                      <a:r>
+                        <a:rPr lang="ru-RU" sz="900" b="0" i="0" u="none" strike="noStrike">
+                          <a:solidFill>
+                            <a:srgbClr val="000000"/>
+                          </a:solidFill>
+                          <a:effectLst/>
+                          <a:latin typeface="Times New Roman" panose="02020603050405020304" pitchFamily="18" charset="0"/>
+                        </a:rPr>
+                        <a:t>Да (если не помечена как `IMMUTABLE`/`STABLE`)</a:t>
+                      </a:r>
+                    </a:p>
+                  </a:txBody>
+                  <a:tcPr marL="7124" marR="7124" marT="7124" marB="0" anchor="ctr">
+                    <a:lnL w="6350" cap="flat" cmpd="sng" algn="ctr">
+                      <a:solidFill>
+                        <a:srgbClr val="000000"/>
+                      </a:solidFill>
+                      <a:prstDash val="solid"/>
+                      <a:round/>
+                      <a:headEnd type="none" w="med" len="med"/>
+                      <a:tailEnd type="none" w="med" len="med"/>
+                    </a:lnL>
+                    <a:lnR w="6350" cap="flat" cmpd="sng" algn="ctr">
+                      <a:solidFill>
+                        <a:srgbClr val="000000"/>
+                      </a:solidFill>
+                      <a:prstDash val="solid"/>
+                      <a:round/>
+                      <a:headEnd type="none" w="med" len="med"/>
+                      <a:tailEnd type="none" w="med" len="med"/>
+                    </a:lnR>
+                    <a:lnT w="6350" cap="flat" cmpd="sng" algn="ctr">
+                      <a:solidFill>
+                        <a:srgbClr val="000000"/>
+                      </a:solidFill>
+                      <a:prstDash val="solid"/>
+                      <a:round/>
+                      <a:headEnd type="none" w="med" len="med"/>
+                      <a:tailEnd type="none" w="med" len="med"/>
+                    </a:lnT>
+                    <a:lnB w="6350" cap="flat" cmpd="sng" algn="ctr">
+                      <a:solidFill>
+                        <a:srgbClr val="000000"/>
+                      </a:solidFill>
+                      <a:prstDash val="solid"/>
+                      <a:round/>
+                      <a:headEnd type="none" w="med" len="med"/>
+                      <a:tailEnd type="none" w="med" len="med"/>
+                    </a:lnB>
+                  </a:tcPr>
+                </a:tc>
+                <a:extLst>
+                  <a:ext uri="{0D108BD9-81ED-4DB2-BD59-A6C34878D82A}">
+                    <a16:rowId xmlns:a16="http://schemas.microsoft.com/office/drawing/2014/main" val="287734792"/>
+                  </a:ext>
+                </a:extLst>
+              </a:tr>
+              <a:tr h="589850">
+                <a:tc>
+                  <a:txBody>
+                    <a:bodyPr/>
+                    <a:lstStyle/>
+                    <a:p>
+                      <a:pPr algn="ctr" fontAlgn="ctr"/>
+                      <a:r>
+                        <a:rPr lang="ru-RU" sz="1000" b="1" i="0" u="none" strike="noStrike">
+                          <a:solidFill>
+                            <a:srgbClr val="000000"/>
+                          </a:solidFill>
+                          <a:effectLst/>
+                          <a:latin typeface="Times New Roman" panose="02020603050405020304" pitchFamily="18" charset="0"/>
+                        </a:rPr>
+                        <a:t>Вызов в </a:t>
+                      </a:r>
+                      <a:r>
+                        <a:rPr lang="en-US" sz="1000" b="1" i="0" u="none" strike="noStrike">
+                          <a:solidFill>
+                            <a:srgbClr val="000000"/>
+                          </a:solidFill>
+                          <a:effectLst/>
+                          <a:latin typeface="Times New Roman" panose="02020603050405020304" pitchFamily="18" charset="0"/>
+                        </a:rPr>
+                        <a:t>SQL</a:t>
+                      </a:r>
+                    </a:p>
+                  </a:txBody>
+                  <a:tcPr marL="7124" marR="7124" marT="7124" marB="0" anchor="ctr">
+                    <a:lnL w="6350" cap="flat" cmpd="sng" algn="ctr">
+                      <a:solidFill>
+                        <a:srgbClr val="000000"/>
+                      </a:solidFill>
+                      <a:prstDash val="solid"/>
+                      <a:round/>
+                      <a:headEnd type="none" w="med" len="med"/>
+                      <a:tailEnd type="none" w="med" len="med"/>
+                    </a:lnL>
+                    <a:lnR w="6350" cap="flat" cmpd="sng" algn="ctr">
+                      <a:solidFill>
+                        <a:srgbClr val="000000"/>
+                      </a:solidFill>
+                      <a:prstDash val="solid"/>
+                      <a:round/>
+                      <a:headEnd type="none" w="med" len="med"/>
+                      <a:tailEnd type="none" w="med" len="med"/>
+                    </a:lnR>
+                    <a:lnT w="6350" cap="flat" cmpd="sng" algn="ctr">
+                      <a:solidFill>
+                        <a:srgbClr val="000000"/>
+                      </a:solidFill>
+                      <a:prstDash val="solid"/>
+                      <a:round/>
+                      <a:headEnd type="none" w="med" len="med"/>
+                      <a:tailEnd type="none" w="med" len="med"/>
+                    </a:lnT>
+                    <a:lnB w="6350" cap="flat" cmpd="sng" algn="ctr">
+                      <a:solidFill>
+                        <a:srgbClr val="000000"/>
+                      </a:solidFill>
+                      <a:prstDash val="solid"/>
+                      <a:round/>
+                      <a:headEnd type="none" w="med" len="med"/>
+                      <a:tailEnd type="none" w="med" len="med"/>
+                    </a:lnB>
+                  </a:tcPr>
+                </a:tc>
+                <a:tc>
+                  <a:txBody>
+                    <a:bodyPr/>
+                    <a:lstStyle/>
+                    <a:p>
+                      <a:pPr algn="ctr" fontAlgn="ctr"/>
+                      <a:r>
+                        <a:rPr lang="ru-RU" sz="900" b="0" i="0" u="none" strike="noStrike">
+                          <a:solidFill>
+                            <a:srgbClr val="000000"/>
+                          </a:solidFill>
+                          <a:effectLst/>
+                          <a:latin typeface="Times New Roman" panose="02020603050405020304" pitchFamily="18" charset="0"/>
+                        </a:rPr>
+                        <a:t>Через `</a:t>
+                      </a:r>
+                      <a:r>
+                        <a:rPr lang="en-US" sz="900" b="0" i="0" u="none" strike="noStrike">
+                          <a:solidFill>
+                            <a:srgbClr val="000000"/>
+                          </a:solidFill>
+                          <a:effectLst/>
+                          <a:latin typeface="Times New Roman" panose="02020603050405020304" pitchFamily="18" charset="0"/>
+                        </a:rPr>
+                        <a:t>EXECUTE`</a:t>
+                      </a:r>
+                    </a:p>
+                  </a:txBody>
+                  <a:tcPr marL="7124" marR="7124" marT="7124" marB="0" anchor="ctr">
+                    <a:lnL w="6350" cap="flat" cmpd="sng" algn="ctr">
+                      <a:solidFill>
+                        <a:srgbClr val="000000"/>
+                      </a:solidFill>
+                      <a:prstDash val="solid"/>
+                      <a:round/>
+                      <a:headEnd type="none" w="med" len="med"/>
+                      <a:tailEnd type="none" w="med" len="med"/>
+                    </a:lnL>
+                    <a:lnR w="6350" cap="flat" cmpd="sng" algn="ctr">
+                      <a:solidFill>
+                        <a:srgbClr val="000000"/>
+                      </a:solidFill>
+                      <a:prstDash val="solid"/>
+                      <a:round/>
+                      <a:headEnd type="none" w="med" len="med"/>
+                      <a:tailEnd type="none" w="med" len="med"/>
+                    </a:lnR>
+                    <a:lnT w="6350" cap="flat" cmpd="sng" algn="ctr">
+                      <a:solidFill>
+                        <a:srgbClr val="000000"/>
+                      </a:solidFill>
+                      <a:prstDash val="solid"/>
+                      <a:round/>
+                      <a:headEnd type="none" w="med" len="med"/>
+                      <a:tailEnd type="none" w="med" len="med"/>
+                    </a:lnT>
+                    <a:lnB w="6350" cap="flat" cmpd="sng" algn="ctr">
+                      <a:solidFill>
+                        <a:srgbClr val="000000"/>
+                      </a:solidFill>
+                      <a:prstDash val="solid"/>
+                      <a:round/>
+                      <a:headEnd type="none" w="med" len="med"/>
+                      <a:tailEnd type="none" w="med" len="med"/>
+                    </a:lnB>
+                  </a:tcPr>
+                </a:tc>
+                <a:tc>
+                  <a:txBody>
+                    <a:bodyPr/>
+                    <a:lstStyle/>
+                    <a:p>
+                      <a:pPr algn="ctr" fontAlgn="ctr"/>
+                      <a:r>
+                        <a:rPr lang="en-US" sz="900" b="0" i="0" u="none" strike="noStrike">
+                          <a:solidFill>
+                            <a:srgbClr val="000000"/>
+                          </a:solidFill>
+                          <a:effectLst/>
+                          <a:latin typeface="Times New Roman" panose="02020603050405020304" pitchFamily="18" charset="0"/>
+                        </a:rPr>
+                        <a:t>В FROM-части запроса (`SELECT * FROM my_view`)</a:t>
+                      </a:r>
+                    </a:p>
+                  </a:txBody>
+                  <a:tcPr marL="7124" marR="7124" marT="7124" marB="0" anchor="ctr">
+                    <a:lnL w="6350" cap="flat" cmpd="sng" algn="ctr">
+                      <a:solidFill>
+                        <a:srgbClr val="000000"/>
+                      </a:solidFill>
+                      <a:prstDash val="solid"/>
+                      <a:round/>
+                      <a:headEnd type="none" w="med" len="med"/>
+                      <a:tailEnd type="none" w="med" len="med"/>
+                    </a:lnL>
+                    <a:lnR w="6350" cap="flat" cmpd="sng" algn="ctr">
+                      <a:solidFill>
+                        <a:srgbClr val="000000"/>
+                      </a:solidFill>
+                      <a:prstDash val="solid"/>
+                      <a:round/>
+                      <a:headEnd type="none" w="med" len="med"/>
+                      <a:tailEnd type="none" w="med" len="med"/>
+                    </a:lnR>
+                    <a:lnT w="6350" cap="flat" cmpd="sng" algn="ctr">
+                      <a:solidFill>
+                        <a:srgbClr val="000000"/>
+                      </a:solidFill>
+                      <a:prstDash val="solid"/>
+                      <a:round/>
+                      <a:headEnd type="none" w="med" len="med"/>
+                      <a:tailEnd type="none" w="med" len="med"/>
+                    </a:lnT>
+                    <a:lnB w="6350" cap="flat" cmpd="sng" algn="ctr">
+                      <a:solidFill>
+                        <a:srgbClr val="000000"/>
+                      </a:solidFill>
+                      <a:prstDash val="solid"/>
+                      <a:round/>
+                      <a:headEnd type="none" w="med" len="med"/>
+                      <a:tailEnd type="none" w="med" len="med"/>
+                    </a:lnB>
+                  </a:tcPr>
+                </a:tc>
+                <a:tc>
+                  <a:txBody>
+                    <a:bodyPr/>
+                    <a:lstStyle/>
+                    <a:p>
+                      <a:pPr algn="ctr" fontAlgn="ctr"/>
+                      <a:r>
+                        <a:rPr lang="ru-RU" sz="900" b="0" i="0" u="none" strike="noStrike">
+                          <a:solidFill>
+                            <a:srgbClr val="000000"/>
+                          </a:solidFill>
+                          <a:effectLst/>
+                          <a:latin typeface="Times New Roman" panose="02020603050405020304" pitchFamily="18" charset="0"/>
+                        </a:rPr>
+                        <a:t>Через `</a:t>
+                      </a:r>
+                      <a:r>
+                        <a:rPr lang="en-US" sz="900" b="0" i="0" u="none" strike="noStrike">
+                          <a:solidFill>
+                            <a:srgbClr val="000000"/>
+                          </a:solidFill>
+                          <a:effectLst/>
+                          <a:latin typeface="Times New Roman" panose="02020603050405020304" pitchFamily="18" charset="0"/>
+                        </a:rPr>
+                        <a:t>CALL procedure_name(...)`</a:t>
+                      </a:r>
+                    </a:p>
+                  </a:txBody>
+                  <a:tcPr marL="7124" marR="7124" marT="7124" marB="0" anchor="ctr">
+                    <a:lnL w="6350" cap="flat" cmpd="sng" algn="ctr">
+                      <a:solidFill>
+                        <a:srgbClr val="000000"/>
+                      </a:solidFill>
+                      <a:prstDash val="solid"/>
+                      <a:round/>
+                      <a:headEnd type="none" w="med" len="med"/>
+                      <a:tailEnd type="none" w="med" len="med"/>
+                    </a:lnL>
+                    <a:lnR w="6350" cap="flat" cmpd="sng" algn="ctr">
+                      <a:solidFill>
+                        <a:srgbClr val="000000"/>
+                      </a:solidFill>
+                      <a:prstDash val="solid"/>
+                      <a:round/>
+                      <a:headEnd type="none" w="med" len="med"/>
+                      <a:tailEnd type="none" w="med" len="med"/>
+                    </a:lnR>
+                    <a:lnT w="6350" cap="flat" cmpd="sng" algn="ctr">
+                      <a:solidFill>
+                        <a:srgbClr val="000000"/>
+                      </a:solidFill>
+                      <a:prstDash val="solid"/>
+                      <a:round/>
+                      <a:headEnd type="none" w="med" len="med"/>
+                      <a:tailEnd type="none" w="med" len="med"/>
+                    </a:lnT>
+                    <a:lnB w="6350" cap="flat" cmpd="sng" algn="ctr">
+                      <a:solidFill>
+                        <a:srgbClr val="000000"/>
+                      </a:solidFill>
+                      <a:prstDash val="solid"/>
+                      <a:round/>
+                      <a:headEnd type="none" w="med" len="med"/>
+                      <a:tailEnd type="none" w="med" len="med"/>
+                    </a:lnB>
+                  </a:tcPr>
+                </a:tc>
+                <a:tc>
+                  <a:txBody>
+                    <a:bodyPr/>
+                    <a:lstStyle/>
+                    <a:p>
+                      <a:pPr algn="ctr" fontAlgn="ctr"/>
+                      <a:r>
+                        <a:rPr lang="en-US" sz="900" b="0" i="0" u="none" strike="noStrike">
+                          <a:solidFill>
+                            <a:srgbClr val="000000"/>
+                          </a:solidFill>
+                          <a:effectLst/>
+                          <a:latin typeface="Times New Roman" panose="02020603050405020304" pitchFamily="18" charset="0"/>
+                        </a:rPr>
+                        <a:t>В выражении или FROM (`SELECT func(...)`, `SELECT * FROM func(...)`)</a:t>
+                      </a:r>
+                    </a:p>
+                  </a:txBody>
+                  <a:tcPr marL="7124" marR="7124" marT="7124" marB="0" anchor="ctr">
+                    <a:lnL w="6350" cap="flat" cmpd="sng" algn="ctr">
+                      <a:solidFill>
+                        <a:srgbClr val="000000"/>
+                      </a:solidFill>
+                      <a:prstDash val="solid"/>
+                      <a:round/>
+                      <a:headEnd type="none" w="med" len="med"/>
+                      <a:tailEnd type="none" w="med" len="med"/>
+                    </a:lnL>
+                    <a:lnR w="6350" cap="flat" cmpd="sng" algn="ctr">
+                      <a:solidFill>
+                        <a:srgbClr val="000000"/>
+                      </a:solidFill>
+                      <a:prstDash val="solid"/>
+                      <a:round/>
+                      <a:headEnd type="none" w="med" len="med"/>
+                      <a:tailEnd type="none" w="med" len="med"/>
+                    </a:lnR>
+                    <a:lnT w="6350" cap="flat" cmpd="sng" algn="ctr">
+                      <a:solidFill>
+                        <a:srgbClr val="000000"/>
+                      </a:solidFill>
+                      <a:prstDash val="solid"/>
+                      <a:round/>
+                      <a:headEnd type="none" w="med" len="med"/>
+                      <a:tailEnd type="none" w="med" len="med"/>
+                    </a:lnT>
+                    <a:lnB w="6350" cap="flat" cmpd="sng" algn="ctr">
+                      <a:solidFill>
+                        <a:srgbClr val="000000"/>
+                      </a:solidFill>
+                      <a:prstDash val="solid"/>
+                      <a:round/>
+                      <a:headEnd type="none" w="med" len="med"/>
+                      <a:tailEnd type="none" w="med" len="med"/>
+                    </a:lnB>
+                  </a:tcPr>
+                </a:tc>
+                <a:extLst>
+                  <a:ext uri="{0D108BD9-81ED-4DB2-BD59-A6C34878D82A}">
+                    <a16:rowId xmlns:a16="http://schemas.microsoft.com/office/drawing/2014/main" val="2391317994"/>
+                  </a:ext>
+                </a:extLst>
+              </a:tr>
+              <a:tr h="589850">
+                <a:tc>
+                  <a:txBody>
+                    <a:bodyPr/>
+                    <a:lstStyle/>
+                    <a:p>
+                      <a:pPr algn="ctr" fontAlgn="ctr"/>
+                      <a:r>
+                        <a:rPr lang="ru-RU" sz="1000" b="1" i="0" u="none" strike="noStrike">
+                          <a:solidFill>
+                            <a:srgbClr val="000000"/>
+                          </a:solidFill>
+                          <a:effectLst/>
+                          <a:latin typeface="Times New Roman" panose="02020603050405020304" pitchFamily="18" charset="0"/>
+                        </a:rPr>
+                        <a:t>Транзакции</a:t>
+                      </a:r>
+                    </a:p>
+                  </a:txBody>
+                  <a:tcPr marL="7124" marR="7124" marT="7124" marB="0" anchor="ctr">
+                    <a:lnL w="6350" cap="flat" cmpd="sng" algn="ctr">
+                      <a:solidFill>
+                        <a:srgbClr val="000000"/>
+                      </a:solidFill>
+                      <a:prstDash val="solid"/>
+                      <a:round/>
+                      <a:headEnd type="none" w="med" len="med"/>
+                      <a:tailEnd type="none" w="med" len="med"/>
+                    </a:lnL>
+                    <a:lnR w="6350" cap="flat" cmpd="sng" algn="ctr">
+                      <a:solidFill>
+                        <a:srgbClr val="000000"/>
+                      </a:solidFill>
+                      <a:prstDash val="solid"/>
+                      <a:round/>
+                      <a:headEnd type="none" w="med" len="med"/>
+                      <a:tailEnd type="none" w="med" len="med"/>
+                    </a:lnR>
+                    <a:lnT w="6350" cap="flat" cmpd="sng" algn="ctr">
+                      <a:solidFill>
+                        <a:srgbClr val="000000"/>
+                      </a:solidFill>
+                      <a:prstDash val="solid"/>
+                      <a:round/>
+                      <a:headEnd type="none" w="med" len="med"/>
+                      <a:tailEnd type="none" w="med" len="med"/>
+                    </a:lnT>
+                    <a:lnB w="6350" cap="flat" cmpd="sng" algn="ctr">
+                      <a:solidFill>
+                        <a:srgbClr val="000000"/>
+                      </a:solidFill>
+                      <a:prstDash val="solid"/>
+                      <a:round/>
+                      <a:headEnd type="none" w="med" len="med"/>
+                      <a:tailEnd type="none" w="med" len="med"/>
+                    </a:lnB>
+                  </a:tcPr>
+                </a:tc>
+                <a:tc>
+                  <a:txBody>
+                    <a:bodyPr/>
+                    <a:lstStyle/>
+                    <a:p>
+                      <a:pPr algn="ctr" fontAlgn="ctr"/>
+                      <a:r>
+                        <a:rPr lang="ru-RU" sz="900" b="0" i="0" u="none" strike="noStrike">
+                          <a:solidFill>
+                            <a:srgbClr val="000000"/>
+                          </a:solidFill>
+                          <a:effectLst/>
+                          <a:latin typeface="Times New Roman" panose="02020603050405020304" pitchFamily="18" charset="0"/>
+                        </a:rPr>
+                        <a:t>Часть текущей транзакции</a:t>
+                      </a:r>
+                    </a:p>
+                  </a:txBody>
+                  <a:tcPr marL="7124" marR="7124" marT="7124" marB="0" anchor="ctr">
+                    <a:lnL w="6350" cap="flat" cmpd="sng" algn="ctr">
+                      <a:solidFill>
+                        <a:srgbClr val="000000"/>
+                      </a:solidFill>
+                      <a:prstDash val="solid"/>
+                      <a:round/>
+                      <a:headEnd type="none" w="med" len="med"/>
+                      <a:tailEnd type="none" w="med" len="med"/>
+                    </a:lnL>
+                    <a:lnR w="6350" cap="flat" cmpd="sng" algn="ctr">
+                      <a:solidFill>
+                        <a:srgbClr val="000000"/>
+                      </a:solidFill>
+                      <a:prstDash val="solid"/>
+                      <a:round/>
+                      <a:headEnd type="none" w="med" len="med"/>
+                      <a:tailEnd type="none" w="med" len="med"/>
+                    </a:lnR>
+                    <a:lnT w="6350" cap="flat" cmpd="sng" algn="ctr">
+                      <a:solidFill>
+                        <a:srgbClr val="000000"/>
+                      </a:solidFill>
+                      <a:prstDash val="solid"/>
+                      <a:round/>
+                      <a:headEnd type="none" w="med" len="med"/>
+                      <a:tailEnd type="none" w="med" len="med"/>
+                    </a:lnT>
+                    <a:lnB w="6350" cap="flat" cmpd="sng" algn="ctr">
+                      <a:solidFill>
+                        <a:srgbClr val="000000"/>
+                      </a:solidFill>
+                      <a:prstDash val="solid"/>
+                      <a:round/>
+                      <a:headEnd type="none" w="med" len="med"/>
+                      <a:tailEnd type="none" w="med" len="med"/>
+                    </a:lnB>
+                  </a:tcPr>
+                </a:tc>
+                <a:tc>
+                  <a:txBody>
+                    <a:bodyPr/>
+                    <a:lstStyle/>
+                    <a:p>
+                      <a:pPr algn="ctr" fontAlgn="ctr"/>
+                      <a:r>
+                        <a:rPr lang="ru-RU" sz="900" b="0" i="0" u="none" strike="noStrike">
+                          <a:solidFill>
+                            <a:srgbClr val="000000"/>
+                          </a:solidFill>
+                          <a:effectLst/>
+                          <a:latin typeface="Times New Roman" panose="02020603050405020304" pitchFamily="18" charset="0"/>
+                        </a:rPr>
+                        <a:t>Часть текущей транзакции</a:t>
+                      </a:r>
+                    </a:p>
+                  </a:txBody>
+                  <a:tcPr marL="7124" marR="7124" marT="7124" marB="0" anchor="ctr">
+                    <a:lnL w="6350" cap="flat" cmpd="sng" algn="ctr">
+                      <a:solidFill>
+                        <a:srgbClr val="000000"/>
+                      </a:solidFill>
+                      <a:prstDash val="solid"/>
+                      <a:round/>
+                      <a:headEnd type="none" w="med" len="med"/>
+                      <a:tailEnd type="none" w="med" len="med"/>
+                    </a:lnL>
+                    <a:lnR w="6350" cap="flat" cmpd="sng" algn="ctr">
+                      <a:solidFill>
+                        <a:srgbClr val="000000"/>
+                      </a:solidFill>
+                      <a:prstDash val="solid"/>
+                      <a:round/>
+                      <a:headEnd type="none" w="med" len="med"/>
+                      <a:tailEnd type="none" w="med" len="med"/>
+                    </a:lnR>
+                    <a:lnT w="6350" cap="flat" cmpd="sng" algn="ctr">
+                      <a:solidFill>
+                        <a:srgbClr val="000000"/>
+                      </a:solidFill>
+                      <a:prstDash val="solid"/>
+                      <a:round/>
+                      <a:headEnd type="none" w="med" len="med"/>
+                      <a:tailEnd type="none" w="med" len="med"/>
+                    </a:lnT>
+                    <a:lnB w="6350" cap="flat" cmpd="sng" algn="ctr">
+                      <a:solidFill>
+                        <a:srgbClr val="000000"/>
+                      </a:solidFill>
+                      <a:prstDash val="solid"/>
+                      <a:round/>
+                      <a:headEnd type="none" w="med" len="med"/>
+                      <a:tailEnd type="none" w="med" len="med"/>
+                    </a:lnB>
+                  </a:tcPr>
+                </a:tc>
+                <a:tc>
+                  <a:txBody>
+                    <a:bodyPr/>
+                    <a:lstStyle/>
+                    <a:p>
+                      <a:pPr algn="ctr" fontAlgn="ctr"/>
+                      <a:r>
+                        <a:rPr lang="ru-RU" sz="900" b="0" i="0" u="none" strike="noStrike">
+                          <a:solidFill>
+                            <a:srgbClr val="000000"/>
+                          </a:solidFill>
+                          <a:effectLst/>
+                          <a:latin typeface="Times New Roman" panose="02020603050405020304" pitchFamily="18" charset="0"/>
+                        </a:rPr>
+                        <a:t>Может управлять транзакциями (BEGIN/COMMIT внутри — с PostgreSQL 11+)</a:t>
+                      </a:r>
+                    </a:p>
+                  </a:txBody>
+                  <a:tcPr marL="7124" marR="7124" marT="7124" marB="0" anchor="ctr">
+                    <a:lnL w="6350" cap="flat" cmpd="sng" algn="ctr">
+                      <a:solidFill>
+                        <a:srgbClr val="000000"/>
+                      </a:solidFill>
+                      <a:prstDash val="solid"/>
+                      <a:round/>
+                      <a:headEnd type="none" w="med" len="med"/>
+                      <a:tailEnd type="none" w="med" len="med"/>
+                    </a:lnL>
+                    <a:lnR w="6350" cap="flat" cmpd="sng" algn="ctr">
+                      <a:solidFill>
+                        <a:srgbClr val="000000"/>
+                      </a:solidFill>
+                      <a:prstDash val="solid"/>
+                      <a:round/>
+                      <a:headEnd type="none" w="med" len="med"/>
+                      <a:tailEnd type="none" w="med" len="med"/>
+                    </a:lnR>
+                    <a:lnT w="6350" cap="flat" cmpd="sng" algn="ctr">
+                      <a:solidFill>
+                        <a:srgbClr val="000000"/>
+                      </a:solidFill>
+                      <a:prstDash val="solid"/>
+                      <a:round/>
+                      <a:headEnd type="none" w="med" len="med"/>
+                      <a:tailEnd type="none" w="med" len="med"/>
+                    </a:lnT>
+                    <a:lnB w="6350" cap="flat" cmpd="sng" algn="ctr">
+                      <a:solidFill>
+                        <a:srgbClr val="000000"/>
+                      </a:solidFill>
+                      <a:prstDash val="solid"/>
+                      <a:round/>
+                      <a:headEnd type="none" w="med" len="med"/>
+                      <a:tailEnd type="none" w="med" len="med"/>
+                    </a:lnB>
+                  </a:tcPr>
+                </a:tc>
+                <a:tc>
+                  <a:txBody>
+                    <a:bodyPr/>
+                    <a:lstStyle/>
+                    <a:p>
+                      <a:pPr algn="ctr" fontAlgn="ctr"/>
+                      <a:r>
+                        <a:rPr lang="ru-RU" sz="900" b="0" i="0" u="none" strike="noStrike">
+                          <a:solidFill>
+                            <a:srgbClr val="000000"/>
+                          </a:solidFill>
+                          <a:effectLst/>
+                          <a:latin typeface="Times New Roman" panose="02020603050405020304" pitchFamily="18" charset="0"/>
+                        </a:rPr>
+                        <a:t>Не может управлять транзакциями напрямую</a:t>
+                      </a:r>
+                    </a:p>
+                  </a:txBody>
+                  <a:tcPr marL="7124" marR="7124" marT="7124" marB="0" anchor="ctr">
+                    <a:lnL w="6350" cap="flat" cmpd="sng" algn="ctr">
+                      <a:solidFill>
+                        <a:srgbClr val="000000"/>
+                      </a:solidFill>
+                      <a:prstDash val="solid"/>
+                      <a:round/>
+                      <a:headEnd type="none" w="med" len="med"/>
+                      <a:tailEnd type="none" w="med" len="med"/>
+                    </a:lnL>
+                    <a:lnR w="6350" cap="flat" cmpd="sng" algn="ctr">
+                      <a:solidFill>
+                        <a:srgbClr val="000000"/>
+                      </a:solidFill>
+                      <a:prstDash val="solid"/>
+                      <a:round/>
+                      <a:headEnd type="none" w="med" len="med"/>
+                      <a:tailEnd type="none" w="med" len="med"/>
+                    </a:lnR>
+                    <a:lnT w="6350" cap="flat" cmpd="sng" algn="ctr">
+                      <a:solidFill>
+                        <a:srgbClr val="000000"/>
+                      </a:solidFill>
+                      <a:prstDash val="solid"/>
+                      <a:round/>
+                      <a:headEnd type="none" w="med" len="med"/>
+                      <a:tailEnd type="none" w="med" len="med"/>
+                    </a:lnT>
+                    <a:lnB w="6350" cap="flat" cmpd="sng" algn="ctr">
+                      <a:solidFill>
+                        <a:srgbClr val="000000"/>
+                      </a:solidFill>
+                      <a:prstDash val="solid"/>
+                      <a:round/>
+                      <a:headEnd type="none" w="med" len="med"/>
+                      <a:tailEnd type="none" w="med" len="med"/>
+                    </a:lnB>
+                  </a:tcPr>
+                </a:tc>
+                <a:extLst>
+                  <a:ext uri="{0D108BD9-81ED-4DB2-BD59-A6C34878D82A}">
+                    <a16:rowId xmlns:a16="http://schemas.microsoft.com/office/drawing/2014/main" val="3456205532"/>
+                  </a:ext>
+                </a:extLst>
+              </a:tr>
+              <a:tr h="393234">
+                <a:tc>
+                  <a:txBody>
+                    <a:bodyPr/>
+                    <a:lstStyle/>
+                    <a:p>
+                      <a:pPr algn="ctr" fontAlgn="ctr"/>
+                      <a:r>
+                        <a:rPr lang="ru-RU" sz="1000" b="1" i="0" u="none" strike="noStrike">
+                          <a:solidFill>
+                            <a:srgbClr val="000000"/>
+                          </a:solidFill>
+                          <a:effectLst/>
+                          <a:latin typeface="Times New Roman" panose="02020603050405020304" pitchFamily="18" charset="0"/>
+                        </a:rPr>
+                        <a:t>*Производительность</a:t>
+                      </a:r>
+                    </a:p>
+                  </a:txBody>
+                  <a:tcPr marL="7124" marR="7124" marT="7124" marB="0" anchor="ctr">
+                    <a:lnL w="6350" cap="flat" cmpd="sng" algn="ctr">
+                      <a:solidFill>
+                        <a:srgbClr val="000000"/>
+                      </a:solidFill>
+                      <a:prstDash val="solid"/>
+                      <a:round/>
+                      <a:headEnd type="none" w="med" len="med"/>
+                      <a:tailEnd type="none" w="med" len="med"/>
+                    </a:lnL>
+                    <a:lnR w="6350" cap="flat" cmpd="sng" algn="ctr">
+                      <a:solidFill>
+                        <a:srgbClr val="000000"/>
+                      </a:solidFill>
+                      <a:prstDash val="solid"/>
+                      <a:round/>
+                      <a:headEnd type="none" w="med" len="med"/>
+                      <a:tailEnd type="none" w="med" len="med"/>
+                    </a:lnR>
+                    <a:lnT w="6350" cap="flat" cmpd="sng" algn="ctr">
+                      <a:solidFill>
+                        <a:srgbClr val="000000"/>
+                      </a:solidFill>
+                      <a:prstDash val="solid"/>
+                      <a:round/>
+                      <a:headEnd type="none" w="med" len="med"/>
+                      <a:tailEnd type="none" w="med" len="med"/>
+                    </a:lnT>
+                    <a:lnB w="6350" cap="flat" cmpd="sng" algn="ctr">
+                      <a:solidFill>
+                        <a:srgbClr val="000000"/>
+                      </a:solidFill>
+                      <a:prstDash val="solid"/>
+                      <a:round/>
+                      <a:headEnd type="none" w="med" len="med"/>
+                      <a:tailEnd type="none" w="med" len="med"/>
+                    </a:lnB>
+                  </a:tcPr>
+                </a:tc>
+                <a:tc>
+                  <a:txBody>
+                    <a:bodyPr/>
+                    <a:lstStyle/>
+                    <a:p>
+                      <a:pPr algn="ctr" fontAlgn="ctr"/>
+                      <a:r>
+                        <a:rPr lang="ru-RU" sz="900" b="0" i="0" u="none" strike="noStrike">
+                          <a:solidFill>
+                            <a:srgbClr val="000000"/>
+                          </a:solidFill>
+                          <a:effectLst/>
+                          <a:latin typeface="Times New Roman" panose="02020603050405020304" pitchFamily="18" charset="0"/>
+                        </a:rPr>
+                        <a:t>Экономия на повторной компиляции плана</a:t>
+                      </a:r>
+                    </a:p>
+                  </a:txBody>
+                  <a:tcPr marL="7124" marR="7124" marT="7124" marB="0" anchor="ctr">
+                    <a:lnL w="6350" cap="flat" cmpd="sng" algn="ctr">
+                      <a:solidFill>
+                        <a:srgbClr val="000000"/>
+                      </a:solidFill>
+                      <a:prstDash val="solid"/>
+                      <a:round/>
+                      <a:headEnd type="none" w="med" len="med"/>
+                      <a:tailEnd type="none" w="med" len="med"/>
+                    </a:lnL>
+                    <a:lnR w="6350" cap="flat" cmpd="sng" algn="ctr">
+                      <a:solidFill>
+                        <a:srgbClr val="000000"/>
+                      </a:solidFill>
+                      <a:prstDash val="solid"/>
+                      <a:round/>
+                      <a:headEnd type="none" w="med" len="med"/>
+                      <a:tailEnd type="none" w="med" len="med"/>
+                    </a:lnR>
+                    <a:lnT w="6350" cap="flat" cmpd="sng" algn="ctr">
+                      <a:solidFill>
+                        <a:srgbClr val="000000"/>
+                      </a:solidFill>
+                      <a:prstDash val="solid"/>
+                      <a:round/>
+                      <a:headEnd type="none" w="med" len="med"/>
+                      <a:tailEnd type="none" w="med" len="med"/>
+                    </a:lnT>
+                    <a:lnB w="6350" cap="flat" cmpd="sng" algn="ctr">
+                      <a:solidFill>
+                        <a:srgbClr val="000000"/>
+                      </a:solidFill>
+                      <a:prstDash val="solid"/>
+                      <a:round/>
+                      <a:headEnd type="none" w="med" len="med"/>
+                      <a:tailEnd type="none" w="med" len="med"/>
+                    </a:lnB>
+                  </a:tcPr>
+                </a:tc>
+                <a:tc>
+                  <a:txBody>
+                    <a:bodyPr/>
+                    <a:lstStyle/>
+                    <a:p>
+                      <a:pPr algn="ctr" fontAlgn="ctr"/>
+                      <a:r>
+                        <a:rPr lang="ru-RU" sz="900" b="0" i="0" u="none" strike="noStrike">
+                          <a:solidFill>
+                            <a:srgbClr val="000000"/>
+                          </a:solidFill>
+                          <a:effectLst/>
+                          <a:latin typeface="Times New Roman" panose="02020603050405020304" pitchFamily="18" charset="0"/>
+                        </a:rPr>
+                        <a:t>Зависит от сложности запроса; может быть медленным</a:t>
+                      </a:r>
+                    </a:p>
+                  </a:txBody>
+                  <a:tcPr marL="7124" marR="7124" marT="7124" marB="0" anchor="ctr">
+                    <a:lnL w="6350" cap="flat" cmpd="sng" algn="ctr">
+                      <a:solidFill>
+                        <a:srgbClr val="000000"/>
+                      </a:solidFill>
+                      <a:prstDash val="solid"/>
+                      <a:round/>
+                      <a:headEnd type="none" w="med" len="med"/>
+                      <a:tailEnd type="none" w="med" len="med"/>
+                    </a:lnL>
+                    <a:lnR w="6350" cap="flat" cmpd="sng" algn="ctr">
+                      <a:solidFill>
+                        <a:srgbClr val="000000"/>
+                      </a:solidFill>
+                      <a:prstDash val="solid"/>
+                      <a:round/>
+                      <a:headEnd type="none" w="med" len="med"/>
+                      <a:tailEnd type="none" w="med" len="med"/>
+                    </a:lnR>
+                    <a:lnT w="6350" cap="flat" cmpd="sng" algn="ctr">
+                      <a:solidFill>
+                        <a:srgbClr val="000000"/>
+                      </a:solidFill>
+                      <a:prstDash val="solid"/>
+                      <a:round/>
+                      <a:headEnd type="none" w="med" len="med"/>
+                      <a:tailEnd type="none" w="med" len="med"/>
+                    </a:lnT>
+                    <a:lnB w="6350" cap="flat" cmpd="sng" algn="ctr">
+                      <a:solidFill>
+                        <a:srgbClr val="000000"/>
+                      </a:solidFill>
+                      <a:prstDash val="solid"/>
+                      <a:round/>
+                      <a:headEnd type="none" w="med" len="med"/>
+                      <a:tailEnd type="none" w="med" len="med"/>
+                    </a:lnB>
+                  </a:tcPr>
+                </a:tc>
+                <a:tc>
+                  <a:txBody>
+                    <a:bodyPr/>
+                    <a:lstStyle/>
+                    <a:p>
+                      <a:pPr algn="ctr" fontAlgn="ctr"/>
+                      <a:r>
+                        <a:rPr lang="ru-RU" sz="900" b="0" i="0" u="none" strike="noStrike">
+                          <a:solidFill>
+                            <a:srgbClr val="000000"/>
+                          </a:solidFill>
+                          <a:effectLst/>
+                          <a:latin typeface="Times New Roman" panose="02020603050405020304" pitchFamily="18" charset="0"/>
+                        </a:rPr>
+                        <a:t>Оптимизированы для пакетного выполнения</a:t>
+                      </a:r>
+                    </a:p>
+                  </a:txBody>
+                  <a:tcPr marL="7124" marR="7124" marT="7124" marB="0" anchor="ctr">
+                    <a:lnL w="6350" cap="flat" cmpd="sng" algn="ctr">
+                      <a:solidFill>
+                        <a:srgbClr val="000000"/>
+                      </a:solidFill>
+                      <a:prstDash val="solid"/>
+                      <a:round/>
+                      <a:headEnd type="none" w="med" len="med"/>
+                      <a:tailEnd type="none" w="med" len="med"/>
+                    </a:lnL>
+                    <a:lnR w="6350" cap="flat" cmpd="sng" algn="ctr">
+                      <a:solidFill>
+                        <a:srgbClr val="000000"/>
+                      </a:solidFill>
+                      <a:prstDash val="solid"/>
+                      <a:round/>
+                      <a:headEnd type="none" w="med" len="med"/>
+                      <a:tailEnd type="none" w="med" len="med"/>
+                    </a:lnR>
+                    <a:lnT w="6350" cap="flat" cmpd="sng" algn="ctr">
+                      <a:solidFill>
+                        <a:srgbClr val="000000"/>
+                      </a:solidFill>
+                      <a:prstDash val="solid"/>
+                      <a:round/>
+                      <a:headEnd type="none" w="med" len="med"/>
+                      <a:tailEnd type="none" w="med" len="med"/>
+                    </a:lnT>
+                    <a:lnB w="6350" cap="flat" cmpd="sng" algn="ctr">
+                      <a:solidFill>
+                        <a:srgbClr val="000000"/>
+                      </a:solidFill>
+                      <a:prstDash val="solid"/>
+                      <a:round/>
+                      <a:headEnd type="none" w="med" len="med"/>
+                      <a:tailEnd type="none" w="med" len="med"/>
+                    </a:lnB>
+                  </a:tcPr>
+                </a:tc>
+                <a:tc>
+                  <a:txBody>
+                    <a:bodyPr/>
+                    <a:lstStyle/>
+                    <a:p>
+                      <a:pPr algn="ctr" fontAlgn="ctr"/>
+                      <a:r>
+                        <a:rPr lang="ru-RU" sz="900" b="0" i="0" u="none" strike="noStrike">
+                          <a:solidFill>
+                            <a:srgbClr val="000000"/>
+                          </a:solidFill>
+                          <a:effectLst/>
+                          <a:latin typeface="Times New Roman" panose="02020603050405020304" pitchFamily="18" charset="0"/>
+                        </a:rPr>
+                        <a:t>Оптимизированы, особенно </a:t>
+                      </a:r>
+                      <a:r>
+                        <a:rPr lang="en-US" sz="900" b="0" i="0" u="none" strike="noStrike">
+                          <a:solidFill>
+                            <a:srgbClr val="000000"/>
+                          </a:solidFill>
+                          <a:effectLst/>
+                          <a:latin typeface="Times New Roman" panose="02020603050405020304" pitchFamily="18" charset="0"/>
+                        </a:rPr>
+                        <a:t>IMMUTABLE/STABLE</a:t>
+                      </a:r>
+                    </a:p>
+                  </a:txBody>
+                  <a:tcPr marL="7124" marR="7124" marT="7124" marB="0" anchor="ctr">
+                    <a:lnL w="6350" cap="flat" cmpd="sng" algn="ctr">
+                      <a:solidFill>
+                        <a:srgbClr val="000000"/>
+                      </a:solidFill>
+                      <a:prstDash val="solid"/>
+                      <a:round/>
+                      <a:headEnd type="none" w="med" len="med"/>
+                      <a:tailEnd type="none" w="med" len="med"/>
+                    </a:lnL>
+                    <a:lnR w="6350" cap="flat" cmpd="sng" algn="ctr">
+                      <a:solidFill>
+                        <a:srgbClr val="000000"/>
+                      </a:solidFill>
+                      <a:prstDash val="solid"/>
+                      <a:round/>
+                      <a:headEnd type="none" w="med" len="med"/>
+                      <a:tailEnd type="none" w="med" len="med"/>
+                    </a:lnR>
+                    <a:lnT w="6350" cap="flat" cmpd="sng" algn="ctr">
+                      <a:solidFill>
+                        <a:srgbClr val="000000"/>
+                      </a:solidFill>
+                      <a:prstDash val="solid"/>
+                      <a:round/>
+                      <a:headEnd type="none" w="med" len="med"/>
+                      <a:tailEnd type="none" w="med" len="med"/>
+                    </a:lnT>
+                    <a:lnB w="6350" cap="flat" cmpd="sng" algn="ctr">
+                      <a:solidFill>
+                        <a:srgbClr val="000000"/>
+                      </a:solidFill>
+                      <a:prstDash val="solid"/>
+                      <a:round/>
+                      <a:headEnd type="none" w="med" len="med"/>
+                      <a:tailEnd type="none" w="med" len="med"/>
+                    </a:lnB>
+                  </a:tcPr>
+                </a:tc>
+                <a:extLst>
+                  <a:ext uri="{0D108BD9-81ED-4DB2-BD59-A6C34878D82A}">
+                    <a16:rowId xmlns:a16="http://schemas.microsoft.com/office/drawing/2014/main" val="3892049737"/>
+                  </a:ext>
+                </a:extLst>
+              </a:tr>
+              <a:tr h="234068">
+                <a:tc>
+                  <a:txBody>
+                    <a:bodyPr/>
+                    <a:lstStyle/>
+                    <a:p>
+                      <a:pPr algn="ctr" fontAlgn="ctr"/>
+                      <a:r>
+                        <a:rPr lang="ru-RU" sz="1000" b="1" i="0" u="none" strike="noStrike">
+                          <a:solidFill>
+                            <a:srgbClr val="000000"/>
+                          </a:solidFill>
+                          <a:effectLst/>
+                          <a:latin typeface="Times New Roman" panose="02020603050405020304" pitchFamily="18" charset="0"/>
+                        </a:rPr>
+                        <a:t>Языки реализации</a:t>
+                      </a:r>
+                    </a:p>
+                  </a:txBody>
+                  <a:tcPr marL="7124" marR="7124" marT="7124" marB="0" anchor="ctr">
+                    <a:lnL w="6350" cap="flat" cmpd="sng" algn="ctr">
+                      <a:solidFill>
+                        <a:srgbClr val="000000"/>
+                      </a:solidFill>
+                      <a:prstDash val="solid"/>
+                      <a:round/>
+                      <a:headEnd type="none" w="med" len="med"/>
+                      <a:tailEnd type="none" w="med" len="med"/>
+                    </a:lnL>
+                    <a:lnR w="6350" cap="flat" cmpd="sng" algn="ctr">
+                      <a:solidFill>
+                        <a:srgbClr val="000000"/>
+                      </a:solidFill>
+                      <a:prstDash val="solid"/>
+                      <a:round/>
+                      <a:headEnd type="none" w="med" len="med"/>
+                      <a:tailEnd type="none" w="med" len="med"/>
+                    </a:lnR>
+                    <a:lnT w="6350" cap="flat" cmpd="sng" algn="ctr">
+                      <a:solidFill>
+                        <a:srgbClr val="000000"/>
+                      </a:solidFill>
+                      <a:prstDash val="solid"/>
+                      <a:round/>
+                      <a:headEnd type="none" w="med" len="med"/>
+                      <a:tailEnd type="none" w="med" len="med"/>
+                    </a:lnT>
+                    <a:lnB w="6350" cap="flat" cmpd="sng" algn="ctr">
+                      <a:solidFill>
+                        <a:srgbClr val="000000"/>
+                      </a:solidFill>
+                      <a:prstDash val="solid"/>
+                      <a:round/>
+                      <a:headEnd type="none" w="med" len="med"/>
+                      <a:tailEnd type="none" w="med" len="med"/>
+                    </a:lnB>
+                  </a:tcPr>
+                </a:tc>
+                <a:tc>
+                  <a:txBody>
+                    <a:bodyPr/>
+                    <a:lstStyle/>
+                    <a:p>
+                      <a:pPr algn="ctr" fontAlgn="ctr"/>
+                      <a:r>
+                        <a:rPr lang="en-US" sz="900" b="0" i="0" u="none" strike="noStrike">
+                          <a:solidFill>
+                            <a:srgbClr val="000000"/>
+                          </a:solidFill>
+                          <a:effectLst/>
+                          <a:latin typeface="Times New Roman" panose="02020603050405020304" pitchFamily="18" charset="0"/>
+                        </a:rPr>
+                        <a:t>SQL</a:t>
+                      </a:r>
+                    </a:p>
+                  </a:txBody>
+                  <a:tcPr marL="7124" marR="7124" marT="7124" marB="0" anchor="ctr">
+                    <a:lnL w="6350" cap="flat" cmpd="sng" algn="ctr">
+                      <a:solidFill>
+                        <a:srgbClr val="000000"/>
+                      </a:solidFill>
+                      <a:prstDash val="solid"/>
+                      <a:round/>
+                      <a:headEnd type="none" w="med" len="med"/>
+                      <a:tailEnd type="none" w="med" len="med"/>
+                    </a:lnL>
+                    <a:lnR w="6350" cap="flat" cmpd="sng" algn="ctr">
+                      <a:solidFill>
+                        <a:srgbClr val="000000"/>
+                      </a:solidFill>
+                      <a:prstDash val="solid"/>
+                      <a:round/>
+                      <a:headEnd type="none" w="med" len="med"/>
+                      <a:tailEnd type="none" w="med" len="med"/>
+                    </a:lnR>
+                    <a:lnT w="6350" cap="flat" cmpd="sng" algn="ctr">
+                      <a:solidFill>
+                        <a:srgbClr val="000000"/>
+                      </a:solidFill>
+                      <a:prstDash val="solid"/>
+                      <a:round/>
+                      <a:headEnd type="none" w="med" len="med"/>
+                      <a:tailEnd type="none" w="med" len="med"/>
+                    </a:lnT>
+                    <a:lnB w="6350" cap="flat" cmpd="sng" algn="ctr">
+                      <a:solidFill>
+                        <a:srgbClr val="000000"/>
+                      </a:solidFill>
+                      <a:prstDash val="solid"/>
+                      <a:round/>
+                      <a:headEnd type="none" w="med" len="med"/>
+                      <a:tailEnd type="none" w="med" len="med"/>
+                    </a:lnB>
+                  </a:tcPr>
+                </a:tc>
+                <a:tc>
+                  <a:txBody>
+                    <a:bodyPr/>
+                    <a:lstStyle/>
+                    <a:p>
+                      <a:pPr algn="ctr" fontAlgn="ctr"/>
+                      <a:r>
+                        <a:rPr lang="en-US" sz="900" b="0" i="0" u="none" strike="noStrike">
+                          <a:solidFill>
+                            <a:srgbClr val="000000"/>
+                          </a:solidFill>
+                          <a:effectLst/>
+                          <a:latin typeface="Times New Roman" panose="02020603050405020304" pitchFamily="18" charset="0"/>
+                        </a:rPr>
+                        <a:t>SQL</a:t>
+                      </a:r>
+                    </a:p>
+                  </a:txBody>
+                  <a:tcPr marL="7124" marR="7124" marT="7124" marB="0" anchor="ctr">
+                    <a:lnL w="6350" cap="flat" cmpd="sng" algn="ctr">
+                      <a:solidFill>
+                        <a:srgbClr val="000000"/>
+                      </a:solidFill>
+                      <a:prstDash val="solid"/>
+                      <a:round/>
+                      <a:headEnd type="none" w="med" len="med"/>
+                      <a:tailEnd type="none" w="med" len="med"/>
+                    </a:lnL>
+                    <a:lnR w="6350" cap="flat" cmpd="sng" algn="ctr">
+                      <a:solidFill>
+                        <a:srgbClr val="000000"/>
+                      </a:solidFill>
+                      <a:prstDash val="solid"/>
+                      <a:round/>
+                      <a:headEnd type="none" w="med" len="med"/>
+                      <a:tailEnd type="none" w="med" len="med"/>
+                    </a:lnR>
+                    <a:lnT w="6350" cap="flat" cmpd="sng" algn="ctr">
+                      <a:solidFill>
+                        <a:srgbClr val="000000"/>
+                      </a:solidFill>
+                      <a:prstDash val="solid"/>
+                      <a:round/>
+                      <a:headEnd type="none" w="med" len="med"/>
+                      <a:tailEnd type="none" w="med" len="med"/>
+                    </a:lnT>
+                    <a:lnB w="6350" cap="flat" cmpd="sng" algn="ctr">
+                      <a:solidFill>
+                        <a:srgbClr val="000000"/>
+                      </a:solidFill>
+                      <a:prstDash val="solid"/>
+                      <a:round/>
+                      <a:headEnd type="none" w="med" len="med"/>
+                      <a:tailEnd type="none" w="med" len="med"/>
+                    </a:lnB>
+                  </a:tcPr>
+                </a:tc>
+                <a:tc>
+                  <a:txBody>
+                    <a:bodyPr/>
+                    <a:lstStyle/>
+                    <a:p>
+                      <a:pPr algn="ctr" fontAlgn="ctr"/>
+                      <a:r>
+                        <a:rPr lang="en-US" sz="900" b="0" i="0" u="none" strike="noStrike">
+                          <a:solidFill>
+                            <a:srgbClr val="000000"/>
+                          </a:solidFill>
+                          <a:effectLst/>
+                          <a:latin typeface="Times New Roman" panose="02020603050405020304" pitchFamily="18" charset="0"/>
+                        </a:rPr>
+                        <a:t>SQL, PL/pgSQL, PL/Python </a:t>
+                      </a:r>
+                      <a:r>
+                        <a:rPr lang="ru-RU" sz="900" b="0" i="0" u="none" strike="noStrike">
+                          <a:solidFill>
+                            <a:srgbClr val="000000"/>
+                          </a:solidFill>
+                          <a:effectLst/>
+                          <a:latin typeface="Times New Roman" panose="02020603050405020304" pitchFamily="18" charset="0"/>
+                        </a:rPr>
+                        <a:t>и др.</a:t>
+                      </a:r>
+                    </a:p>
+                  </a:txBody>
+                  <a:tcPr marL="7124" marR="7124" marT="7124" marB="0" anchor="ctr">
+                    <a:lnL w="6350" cap="flat" cmpd="sng" algn="ctr">
+                      <a:solidFill>
+                        <a:srgbClr val="000000"/>
+                      </a:solidFill>
+                      <a:prstDash val="solid"/>
+                      <a:round/>
+                      <a:headEnd type="none" w="med" len="med"/>
+                      <a:tailEnd type="none" w="med" len="med"/>
+                    </a:lnL>
+                    <a:lnR w="6350" cap="flat" cmpd="sng" algn="ctr">
+                      <a:solidFill>
+                        <a:srgbClr val="000000"/>
+                      </a:solidFill>
+                      <a:prstDash val="solid"/>
+                      <a:round/>
+                      <a:headEnd type="none" w="med" len="med"/>
+                      <a:tailEnd type="none" w="med" len="med"/>
+                    </a:lnR>
+                    <a:lnT w="6350" cap="flat" cmpd="sng" algn="ctr">
+                      <a:solidFill>
+                        <a:srgbClr val="000000"/>
+                      </a:solidFill>
+                      <a:prstDash val="solid"/>
+                      <a:round/>
+                      <a:headEnd type="none" w="med" len="med"/>
+                      <a:tailEnd type="none" w="med" len="med"/>
+                    </a:lnT>
+                    <a:lnB w="6350" cap="flat" cmpd="sng" algn="ctr">
+                      <a:solidFill>
+                        <a:srgbClr val="000000"/>
+                      </a:solidFill>
+                      <a:prstDash val="solid"/>
+                      <a:round/>
+                      <a:headEnd type="none" w="med" len="med"/>
+                      <a:tailEnd type="none" w="med" len="med"/>
+                    </a:lnB>
+                  </a:tcPr>
+                </a:tc>
+                <a:tc>
+                  <a:txBody>
+                    <a:bodyPr/>
+                    <a:lstStyle/>
+                    <a:p>
+                      <a:pPr algn="ctr" fontAlgn="ctr"/>
+                      <a:r>
+                        <a:rPr lang="en-US" sz="900" b="0" i="0" u="none" strike="noStrike">
+                          <a:solidFill>
+                            <a:srgbClr val="000000"/>
+                          </a:solidFill>
+                          <a:effectLst/>
+                          <a:latin typeface="Times New Roman" panose="02020603050405020304" pitchFamily="18" charset="0"/>
+                        </a:rPr>
+                        <a:t>SQL, PL/pgSQL, PL/Python </a:t>
+                      </a:r>
+                      <a:r>
+                        <a:rPr lang="ru-RU" sz="900" b="0" i="0" u="none" strike="noStrike">
+                          <a:solidFill>
+                            <a:srgbClr val="000000"/>
+                          </a:solidFill>
+                          <a:effectLst/>
+                          <a:latin typeface="Times New Roman" panose="02020603050405020304" pitchFamily="18" charset="0"/>
+                        </a:rPr>
+                        <a:t>и др.</a:t>
+                      </a:r>
+                    </a:p>
+                  </a:txBody>
+                  <a:tcPr marL="7124" marR="7124" marT="7124" marB="0" anchor="ctr">
+                    <a:lnL w="6350" cap="flat" cmpd="sng" algn="ctr">
+                      <a:solidFill>
+                        <a:srgbClr val="000000"/>
+                      </a:solidFill>
+                      <a:prstDash val="solid"/>
+                      <a:round/>
+                      <a:headEnd type="none" w="med" len="med"/>
+                      <a:tailEnd type="none" w="med" len="med"/>
+                    </a:lnL>
+                    <a:lnR w="6350" cap="flat" cmpd="sng" algn="ctr">
+                      <a:solidFill>
+                        <a:srgbClr val="000000"/>
+                      </a:solidFill>
+                      <a:prstDash val="solid"/>
+                      <a:round/>
+                      <a:headEnd type="none" w="med" len="med"/>
+                      <a:tailEnd type="none" w="med" len="med"/>
+                    </a:lnR>
+                    <a:lnT w="6350" cap="flat" cmpd="sng" algn="ctr">
+                      <a:solidFill>
+                        <a:srgbClr val="000000"/>
+                      </a:solidFill>
+                      <a:prstDash val="solid"/>
+                      <a:round/>
+                      <a:headEnd type="none" w="med" len="med"/>
+                      <a:tailEnd type="none" w="med" len="med"/>
+                    </a:lnT>
+                    <a:lnB w="6350" cap="flat" cmpd="sng" algn="ctr">
+                      <a:solidFill>
+                        <a:srgbClr val="000000"/>
+                      </a:solidFill>
+                      <a:prstDash val="solid"/>
+                      <a:round/>
+                      <a:headEnd type="none" w="med" len="med"/>
+                      <a:tailEnd type="none" w="med" len="med"/>
+                    </a:lnB>
+                  </a:tcPr>
+                </a:tc>
+                <a:extLst>
+                  <a:ext uri="{0D108BD9-81ED-4DB2-BD59-A6C34878D82A}">
+                    <a16:rowId xmlns:a16="http://schemas.microsoft.com/office/drawing/2014/main" val="3741996155"/>
+                  </a:ext>
+                </a:extLst>
+              </a:tr>
+              <a:tr h="393234">
+                <a:tc>
+                  <a:txBody>
+                    <a:bodyPr/>
+                    <a:lstStyle/>
+                    <a:p>
+                      <a:pPr algn="ctr" fontAlgn="ctr"/>
+                      <a:r>
+                        <a:rPr lang="ru-RU" sz="1000" b="1" i="0" u="none" strike="noStrike">
+                          <a:solidFill>
+                            <a:srgbClr val="000000"/>
+                          </a:solidFill>
+                          <a:effectLst/>
+                          <a:latin typeface="Times New Roman" panose="02020603050405020304" pitchFamily="18" charset="0"/>
+                        </a:rPr>
+                        <a:t>Материализация</a:t>
+                      </a:r>
+                    </a:p>
+                  </a:txBody>
+                  <a:tcPr marL="7124" marR="7124" marT="7124" marB="0" anchor="ctr">
+                    <a:lnL w="6350" cap="flat" cmpd="sng" algn="ctr">
+                      <a:solidFill>
+                        <a:srgbClr val="000000"/>
+                      </a:solidFill>
+                      <a:prstDash val="solid"/>
+                      <a:round/>
+                      <a:headEnd type="none" w="med" len="med"/>
+                      <a:tailEnd type="none" w="med" len="med"/>
+                    </a:lnL>
+                    <a:lnR w="6350" cap="flat" cmpd="sng" algn="ctr">
+                      <a:solidFill>
+                        <a:srgbClr val="000000"/>
+                      </a:solidFill>
+                      <a:prstDash val="solid"/>
+                      <a:round/>
+                      <a:headEnd type="none" w="med" len="med"/>
+                      <a:tailEnd type="none" w="med" len="med"/>
+                    </a:lnR>
+                    <a:lnT w="6350" cap="flat" cmpd="sng" algn="ctr">
+                      <a:solidFill>
+                        <a:srgbClr val="000000"/>
+                      </a:solidFill>
+                      <a:prstDash val="solid"/>
+                      <a:round/>
+                      <a:headEnd type="none" w="med" len="med"/>
+                      <a:tailEnd type="none" w="med" len="med"/>
+                    </a:lnT>
+                    <a:lnB w="6350" cap="flat" cmpd="sng" algn="ctr">
+                      <a:solidFill>
+                        <a:srgbClr val="000000"/>
+                      </a:solidFill>
+                      <a:prstDash val="solid"/>
+                      <a:round/>
+                      <a:headEnd type="none" w="med" len="med"/>
+                      <a:tailEnd type="none" w="med" len="med"/>
+                    </a:lnB>
+                  </a:tcPr>
+                </a:tc>
+                <a:tc>
+                  <a:txBody>
+                    <a:bodyPr/>
+                    <a:lstStyle/>
+                    <a:p>
+                      <a:pPr algn="ctr" fontAlgn="ctr"/>
+                      <a:r>
+                        <a:rPr lang="ru-RU" sz="900" b="0" i="0" u="none" strike="noStrike">
+                          <a:solidFill>
+                            <a:srgbClr val="000000"/>
+                          </a:solidFill>
+                          <a:effectLst/>
+                          <a:latin typeface="Times New Roman" panose="02020603050405020304" pitchFamily="18" charset="0"/>
+                        </a:rPr>
+                        <a:t>Нет</a:t>
+                      </a:r>
+                    </a:p>
+                  </a:txBody>
+                  <a:tcPr marL="7124" marR="7124" marT="7124" marB="0" anchor="ctr">
+                    <a:lnL w="6350" cap="flat" cmpd="sng" algn="ctr">
+                      <a:solidFill>
+                        <a:srgbClr val="000000"/>
+                      </a:solidFill>
+                      <a:prstDash val="solid"/>
+                      <a:round/>
+                      <a:headEnd type="none" w="med" len="med"/>
+                      <a:tailEnd type="none" w="med" len="med"/>
+                    </a:lnL>
+                    <a:lnR w="6350" cap="flat" cmpd="sng" algn="ctr">
+                      <a:solidFill>
+                        <a:srgbClr val="000000"/>
+                      </a:solidFill>
+                      <a:prstDash val="solid"/>
+                      <a:round/>
+                      <a:headEnd type="none" w="med" len="med"/>
+                      <a:tailEnd type="none" w="med" len="med"/>
+                    </a:lnR>
+                    <a:lnT w="6350" cap="flat" cmpd="sng" algn="ctr">
+                      <a:solidFill>
+                        <a:srgbClr val="000000"/>
+                      </a:solidFill>
+                      <a:prstDash val="solid"/>
+                      <a:round/>
+                      <a:headEnd type="none" w="med" len="med"/>
+                      <a:tailEnd type="none" w="med" len="med"/>
+                    </a:lnT>
+                    <a:lnB w="6350" cap="flat" cmpd="sng" algn="ctr">
+                      <a:solidFill>
+                        <a:srgbClr val="000000"/>
+                      </a:solidFill>
+                      <a:prstDash val="solid"/>
+                      <a:round/>
+                      <a:headEnd type="none" w="med" len="med"/>
+                      <a:tailEnd type="none" w="med" len="med"/>
+                    </a:lnB>
+                  </a:tcPr>
+                </a:tc>
+                <a:tc>
+                  <a:txBody>
+                    <a:bodyPr/>
+                    <a:lstStyle/>
+                    <a:p>
+                      <a:pPr algn="ctr" fontAlgn="ctr"/>
+                      <a:r>
+                        <a:rPr lang="ru-RU" sz="900" b="0" i="0" u="none" strike="noStrike">
+                          <a:solidFill>
+                            <a:srgbClr val="000000"/>
+                          </a:solidFill>
+                          <a:effectLst/>
+                          <a:latin typeface="Times New Roman" panose="02020603050405020304" pitchFamily="18" charset="0"/>
+                        </a:rPr>
+                        <a:t>Обычный </a:t>
+                      </a:r>
+                      <a:r>
+                        <a:rPr lang="en-US" sz="900" b="0" i="0" u="none" strike="noStrike">
+                          <a:solidFill>
+                            <a:srgbClr val="000000"/>
+                          </a:solidFill>
+                          <a:effectLst/>
+                          <a:latin typeface="Times New Roman" panose="02020603050405020304" pitchFamily="18" charset="0"/>
+                        </a:rPr>
+                        <a:t>VIEW — </a:t>
+                      </a:r>
+                      <a:r>
+                        <a:rPr lang="ru-RU" sz="900" b="0" i="0" u="none" strike="noStrike">
+                          <a:solidFill>
+                            <a:srgbClr val="000000"/>
+                          </a:solidFill>
+                          <a:effectLst/>
+                          <a:latin typeface="Times New Roman" panose="02020603050405020304" pitchFamily="18" charset="0"/>
+                        </a:rPr>
+                        <a:t>нет; </a:t>
+                      </a:r>
+                      <a:r>
+                        <a:rPr lang="en-US" sz="900" b="0" i="0" u="none" strike="noStrike">
+                          <a:solidFill>
+                            <a:srgbClr val="000000"/>
+                          </a:solidFill>
+                          <a:effectLst/>
+                          <a:latin typeface="Times New Roman" panose="02020603050405020304" pitchFamily="18" charset="0"/>
+                        </a:rPr>
+                        <a:t>MATERIALIZED VIEW — </a:t>
+                      </a:r>
+                      <a:r>
+                        <a:rPr lang="ru-RU" sz="900" b="0" i="0" u="none" strike="noStrike">
+                          <a:solidFill>
+                            <a:srgbClr val="000000"/>
+                          </a:solidFill>
+                          <a:effectLst/>
+                          <a:latin typeface="Times New Roman" panose="02020603050405020304" pitchFamily="18" charset="0"/>
+                        </a:rPr>
+                        <a:t>да</a:t>
+                      </a:r>
+                    </a:p>
+                  </a:txBody>
+                  <a:tcPr marL="7124" marR="7124" marT="7124" marB="0" anchor="ctr">
+                    <a:lnL w="6350" cap="flat" cmpd="sng" algn="ctr">
+                      <a:solidFill>
+                        <a:srgbClr val="000000"/>
+                      </a:solidFill>
+                      <a:prstDash val="solid"/>
+                      <a:round/>
+                      <a:headEnd type="none" w="med" len="med"/>
+                      <a:tailEnd type="none" w="med" len="med"/>
+                    </a:lnL>
+                    <a:lnR w="6350" cap="flat" cmpd="sng" algn="ctr">
+                      <a:solidFill>
+                        <a:srgbClr val="000000"/>
+                      </a:solidFill>
+                      <a:prstDash val="solid"/>
+                      <a:round/>
+                      <a:headEnd type="none" w="med" len="med"/>
+                      <a:tailEnd type="none" w="med" len="med"/>
+                    </a:lnR>
+                    <a:lnT w="6350" cap="flat" cmpd="sng" algn="ctr">
+                      <a:solidFill>
+                        <a:srgbClr val="000000"/>
+                      </a:solidFill>
+                      <a:prstDash val="solid"/>
+                      <a:round/>
+                      <a:headEnd type="none" w="med" len="med"/>
+                      <a:tailEnd type="none" w="med" len="med"/>
+                    </a:lnT>
+                    <a:lnB w="6350" cap="flat" cmpd="sng" algn="ctr">
+                      <a:solidFill>
+                        <a:srgbClr val="000000"/>
+                      </a:solidFill>
+                      <a:prstDash val="solid"/>
+                      <a:round/>
+                      <a:headEnd type="none" w="med" len="med"/>
+                      <a:tailEnd type="none" w="med" len="med"/>
+                    </a:lnB>
+                  </a:tcPr>
+                </a:tc>
+                <a:tc>
+                  <a:txBody>
+                    <a:bodyPr/>
+                    <a:lstStyle/>
+                    <a:p>
+                      <a:pPr algn="ctr" fontAlgn="ctr"/>
+                      <a:r>
+                        <a:rPr lang="ru-RU" sz="900" b="0" i="0" u="none" strike="noStrike">
+                          <a:solidFill>
+                            <a:srgbClr val="000000"/>
+                          </a:solidFill>
+                          <a:effectLst/>
+                          <a:latin typeface="Times New Roman" panose="02020603050405020304" pitchFamily="18" charset="0"/>
+                        </a:rPr>
+                        <a:t>Нет</a:t>
+                      </a:r>
+                    </a:p>
+                  </a:txBody>
+                  <a:tcPr marL="7124" marR="7124" marT="7124" marB="0" anchor="ctr">
+                    <a:lnL w="6350" cap="flat" cmpd="sng" algn="ctr">
+                      <a:solidFill>
+                        <a:srgbClr val="000000"/>
+                      </a:solidFill>
+                      <a:prstDash val="solid"/>
+                      <a:round/>
+                      <a:headEnd type="none" w="med" len="med"/>
+                      <a:tailEnd type="none" w="med" len="med"/>
+                    </a:lnL>
+                    <a:lnR w="6350" cap="flat" cmpd="sng" algn="ctr">
+                      <a:solidFill>
+                        <a:srgbClr val="000000"/>
+                      </a:solidFill>
+                      <a:prstDash val="solid"/>
+                      <a:round/>
+                      <a:headEnd type="none" w="med" len="med"/>
+                      <a:tailEnd type="none" w="med" len="med"/>
+                    </a:lnR>
+                    <a:lnT w="6350" cap="flat" cmpd="sng" algn="ctr">
+                      <a:solidFill>
+                        <a:srgbClr val="000000"/>
+                      </a:solidFill>
+                      <a:prstDash val="solid"/>
+                      <a:round/>
+                      <a:headEnd type="none" w="med" len="med"/>
+                      <a:tailEnd type="none" w="med" len="med"/>
+                    </a:lnT>
+                    <a:lnB w="6350" cap="flat" cmpd="sng" algn="ctr">
+                      <a:solidFill>
+                        <a:srgbClr val="000000"/>
+                      </a:solidFill>
+                      <a:prstDash val="solid"/>
+                      <a:round/>
+                      <a:headEnd type="none" w="med" len="med"/>
+                      <a:tailEnd type="none" w="med" len="med"/>
+                    </a:lnB>
+                  </a:tcPr>
+                </a:tc>
+                <a:tc>
+                  <a:txBody>
+                    <a:bodyPr/>
+                    <a:lstStyle/>
+                    <a:p>
+                      <a:pPr algn="ctr" fontAlgn="ctr"/>
+                      <a:r>
+                        <a:rPr lang="ru-RU" sz="900" b="0" i="0" u="none" strike="noStrike">
+                          <a:solidFill>
+                            <a:srgbClr val="000000"/>
+                          </a:solidFill>
+                          <a:effectLst/>
+                          <a:latin typeface="Times New Roman" panose="02020603050405020304" pitchFamily="18" charset="0"/>
+                        </a:rPr>
+                        <a:t>Нет</a:t>
+                      </a:r>
+                    </a:p>
+                  </a:txBody>
+                  <a:tcPr marL="7124" marR="7124" marT="7124" marB="0" anchor="ctr">
+                    <a:lnL w="6350" cap="flat" cmpd="sng" algn="ctr">
+                      <a:solidFill>
+                        <a:srgbClr val="000000"/>
+                      </a:solidFill>
+                      <a:prstDash val="solid"/>
+                      <a:round/>
+                      <a:headEnd type="none" w="med" len="med"/>
+                      <a:tailEnd type="none" w="med" len="med"/>
+                    </a:lnL>
+                    <a:lnR w="6350" cap="flat" cmpd="sng" algn="ctr">
+                      <a:solidFill>
+                        <a:srgbClr val="000000"/>
+                      </a:solidFill>
+                      <a:prstDash val="solid"/>
+                      <a:round/>
+                      <a:headEnd type="none" w="med" len="med"/>
+                      <a:tailEnd type="none" w="med" len="med"/>
+                    </a:lnR>
+                    <a:lnT w="6350" cap="flat" cmpd="sng" algn="ctr">
+                      <a:solidFill>
+                        <a:srgbClr val="000000"/>
+                      </a:solidFill>
+                      <a:prstDash val="solid"/>
+                      <a:round/>
+                      <a:headEnd type="none" w="med" len="med"/>
+                      <a:tailEnd type="none" w="med" len="med"/>
+                    </a:lnT>
+                    <a:lnB w="6350" cap="flat" cmpd="sng" algn="ctr">
+                      <a:solidFill>
+                        <a:srgbClr val="000000"/>
+                      </a:solidFill>
+                      <a:prstDash val="solid"/>
+                      <a:round/>
+                      <a:headEnd type="none" w="med" len="med"/>
+                      <a:tailEnd type="none" w="med" len="med"/>
+                    </a:lnB>
+                  </a:tcPr>
+                </a:tc>
+                <a:extLst>
+                  <a:ext uri="{0D108BD9-81ED-4DB2-BD59-A6C34878D82A}">
+                    <a16:rowId xmlns:a16="http://schemas.microsoft.com/office/drawing/2014/main" val="2912440468"/>
+                  </a:ext>
+                </a:extLst>
+              </a:tr>
+              <a:tr h="589850">
+                <a:tc>
+                  <a:txBody>
+                    <a:bodyPr/>
+                    <a:lstStyle/>
+                    <a:p>
+                      <a:pPr algn="ctr" fontAlgn="ctr"/>
+                      <a:r>
+                        <a:rPr lang="ru-RU" sz="1000" b="1" i="0" u="none" strike="noStrike">
+                          <a:solidFill>
+                            <a:srgbClr val="000000"/>
+                          </a:solidFill>
+                          <a:effectLst/>
+                          <a:latin typeface="Times New Roman" panose="02020603050405020304" pitchFamily="18" charset="0"/>
+                        </a:rPr>
+                        <a:t>Пример использования</a:t>
+                      </a:r>
+                    </a:p>
+                  </a:txBody>
+                  <a:tcPr marL="7124" marR="7124" marT="7124" marB="0" anchor="ctr">
+                    <a:lnL w="6350" cap="flat" cmpd="sng" algn="ctr">
+                      <a:solidFill>
+                        <a:srgbClr val="000000"/>
+                      </a:solidFill>
+                      <a:prstDash val="solid"/>
+                      <a:round/>
+                      <a:headEnd type="none" w="med" len="med"/>
+                      <a:tailEnd type="none" w="med" len="med"/>
+                    </a:lnL>
+                    <a:lnR w="6350" cap="flat" cmpd="sng" algn="ctr">
+                      <a:solidFill>
+                        <a:srgbClr val="000000"/>
+                      </a:solidFill>
+                      <a:prstDash val="solid"/>
+                      <a:round/>
+                      <a:headEnd type="none" w="med" len="med"/>
+                      <a:tailEnd type="none" w="med" len="med"/>
+                    </a:lnR>
+                    <a:lnT w="6350" cap="flat" cmpd="sng" algn="ctr">
+                      <a:solidFill>
+                        <a:srgbClr val="000000"/>
+                      </a:solidFill>
+                      <a:prstDash val="solid"/>
+                      <a:round/>
+                      <a:headEnd type="none" w="med" len="med"/>
+                      <a:tailEnd type="none" w="med" len="med"/>
+                    </a:lnT>
+                    <a:lnB w="6350" cap="flat" cmpd="sng" algn="ctr">
+                      <a:solidFill>
+                        <a:srgbClr val="000000"/>
+                      </a:solidFill>
+                      <a:prstDash val="solid"/>
+                      <a:round/>
+                      <a:headEnd type="none" w="med" len="med"/>
+                      <a:tailEnd type="none" w="med" len="med"/>
+                    </a:lnB>
+                  </a:tcPr>
+                </a:tc>
+                <a:tc>
+                  <a:txBody>
+                    <a:bodyPr/>
+                    <a:lstStyle/>
+                    <a:p>
+                      <a:pPr algn="ctr" fontAlgn="ctr"/>
+                      <a:r>
+                        <a:rPr lang="en-US" sz="900" b="0" i="0" u="none" strike="noStrike">
+                          <a:solidFill>
+                            <a:srgbClr val="000000"/>
+                          </a:solidFill>
+                          <a:effectLst/>
+                          <a:latin typeface="Times New Roman" panose="02020603050405020304" pitchFamily="18" charset="0"/>
+                        </a:rPr>
+                        <a:t>`PREPARE q(int) AS SELECT * FROM t WHERE id = $1; EXECUTE q(5);`</a:t>
+                      </a:r>
+                    </a:p>
+                  </a:txBody>
+                  <a:tcPr marL="7124" marR="7124" marT="7124" marB="0" anchor="ctr">
+                    <a:lnL w="6350" cap="flat" cmpd="sng" algn="ctr">
+                      <a:solidFill>
+                        <a:srgbClr val="000000"/>
+                      </a:solidFill>
+                      <a:prstDash val="solid"/>
+                      <a:round/>
+                      <a:headEnd type="none" w="med" len="med"/>
+                      <a:tailEnd type="none" w="med" len="med"/>
+                    </a:lnL>
+                    <a:lnR w="6350" cap="flat" cmpd="sng" algn="ctr">
+                      <a:solidFill>
+                        <a:srgbClr val="000000"/>
+                      </a:solidFill>
+                      <a:prstDash val="solid"/>
+                      <a:round/>
+                      <a:headEnd type="none" w="med" len="med"/>
+                      <a:tailEnd type="none" w="med" len="med"/>
+                    </a:lnR>
+                    <a:lnT w="6350" cap="flat" cmpd="sng" algn="ctr">
+                      <a:solidFill>
+                        <a:srgbClr val="000000"/>
+                      </a:solidFill>
+                      <a:prstDash val="solid"/>
+                      <a:round/>
+                      <a:headEnd type="none" w="med" len="med"/>
+                      <a:tailEnd type="none" w="med" len="med"/>
+                    </a:lnT>
+                    <a:lnB w="6350" cap="flat" cmpd="sng" algn="ctr">
+                      <a:solidFill>
+                        <a:srgbClr val="000000"/>
+                      </a:solidFill>
+                      <a:prstDash val="solid"/>
+                      <a:round/>
+                      <a:headEnd type="none" w="med" len="med"/>
+                      <a:tailEnd type="none" w="med" len="med"/>
+                    </a:lnB>
+                  </a:tcPr>
+                </a:tc>
+                <a:tc>
+                  <a:txBody>
+                    <a:bodyPr/>
+                    <a:lstStyle/>
+                    <a:p>
+                      <a:pPr algn="ctr" fontAlgn="ctr"/>
+                      <a:r>
+                        <a:rPr lang="en-US" sz="900" b="0" i="0" u="none" strike="noStrike">
+                          <a:solidFill>
+                            <a:srgbClr val="000000"/>
+                          </a:solidFill>
+                          <a:effectLst/>
+                          <a:latin typeface="Times New Roman" panose="02020603050405020304" pitchFamily="18" charset="0"/>
+                        </a:rPr>
+                        <a:t>`CREATE VIEW active_users AS SELECT * FROM users WHERE active = true;`</a:t>
+                      </a:r>
+                    </a:p>
+                  </a:txBody>
+                  <a:tcPr marL="7124" marR="7124" marT="7124" marB="0" anchor="ctr">
+                    <a:lnL w="6350" cap="flat" cmpd="sng" algn="ctr">
+                      <a:solidFill>
+                        <a:srgbClr val="000000"/>
+                      </a:solidFill>
+                      <a:prstDash val="solid"/>
+                      <a:round/>
+                      <a:headEnd type="none" w="med" len="med"/>
+                      <a:tailEnd type="none" w="med" len="med"/>
+                    </a:lnL>
+                    <a:lnR w="6350" cap="flat" cmpd="sng" algn="ctr">
+                      <a:solidFill>
+                        <a:srgbClr val="000000"/>
+                      </a:solidFill>
+                      <a:prstDash val="solid"/>
+                      <a:round/>
+                      <a:headEnd type="none" w="med" len="med"/>
+                      <a:tailEnd type="none" w="med" len="med"/>
+                    </a:lnR>
+                    <a:lnT w="6350" cap="flat" cmpd="sng" algn="ctr">
+                      <a:solidFill>
+                        <a:srgbClr val="000000"/>
+                      </a:solidFill>
+                      <a:prstDash val="solid"/>
+                      <a:round/>
+                      <a:headEnd type="none" w="med" len="med"/>
+                      <a:tailEnd type="none" w="med" len="med"/>
+                    </a:lnT>
+                    <a:lnB w="6350" cap="flat" cmpd="sng" algn="ctr">
+                      <a:solidFill>
+                        <a:srgbClr val="000000"/>
+                      </a:solidFill>
+                      <a:prstDash val="solid"/>
+                      <a:round/>
+                      <a:headEnd type="none" w="med" len="med"/>
+                      <a:tailEnd type="none" w="med" len="med"/>
+                    </a:lnB>
+                  </a:tcPr>
+                </a:tc>
+                <a:tc>
+                  <a:txBody>
+                    <a:bodyPr/>
+                    <a:lstStyle/>
+                    <a:p>
+                      <a:pPr algn="ctr" fontAlgn="ctr"/>
+                      <a:r>
+                        <a:rPr lang="en-US" sz="900" b="0" i="0" u="none" strike="noStrike">
+                          <a:solidFill>
+                            <a:srgbClr val="000000"/>
+                          </a:solidFill>
+                          <a:effectLst/>
+                          <a:latin typeface="Times New Roman" panose="02020603050405020304" pitchFamily="18" charset="0"/>
+                        </a:rPr>
+                        <a:t>`CALL update_user_status(123, 'inactive');`</a:t>
+                      </a:r>
+                    </a:p>
+                  </a:txBody>
+                  <a:tcPr marL="7124" marR="7124" marT="7124" marB="0" anchor="ctr">
+                    <a:lnL w="6350" cap="flat" cmpd="sng" algn="ctr">
+                      <a:solidFill>
+                        <a:srgbClr val="000000"/>
+                      </a:solidFill>
+                      <a:prstDash val="solid"/>
+                      <a:round/>
+                      <a:headEnd type="none" w="med" len="med"/>
+                      <a:tailEnd type="none" w="med" len="med"/>
+                    </a:lnL>
+                    <a:lnR w="6350" cap="flat" cmpd="sng" algn="ctr">
+                      <a:solidFill>
+                        <a:srgbClr val="000000"/>
+                      </a:solidFill>
+                      <a:prstDash val="solid"/>
+                      <a:round/>
+                      <a:headEnd type="none" w="med" len="med"/>
+                      <a:tailEnd type="none" w="med" len="med"/>
+                    </a:lnR>
+                    <a:lnT w="6350" cap="flat" cmpd="sng" algn="ctr">
+                      <a:solidFill>
+                        <a:srgbClr val="000000"/>
+                      </a:solidFill>
+                      <a:prstDash val="solid"/>
+                      <a:round/>
+                      <a:headEnd type="none" w="med" len="med"/>
+                      <a:tailEnd type="none" w="med" len="med"/>
+                    </a:lnT>
+                    <a:lnB w="6350" cap="flat" cmpd="sng" algn="ctr">
+                      <a:solidFill>
+                        <a:srgbClr val="000000"/>
+                      </a:solidFill>
+                      <a:prstDash val="solid"/>
+                      <a:round/>
+                      <a:headEnd type="none" w="med" len="med"/>
+                      <a:tailEnd type="none" w="med" len="med"/>
+                    </a:lnB>
+                  </a:tcPr>
+                </a:tc>
+                <a:tc>
+                  <a:txBody>
+                    <a:bodyPr/>
+                    <a:lstStyle/>
+                    <a:p>
+                      <a:pPr algn="ctr" fontAlgn="ctr"/>
+                      <a:r>
+                        <a:rPr lang="en-US" sz="900" b="0" i="0" u="none" strike="noStrike" dirty="0">
+                          <a:solidFill>
+                            <a:srgbClr val="000000"/>
+                          </a:solidFill>
+                          <a:effectLst/>
+                          <a:latin typeface="Times New Roman" panose="02020603050405020304" pitchFamily="18" charset="0"/>
+                        </a:rPr>
+                        <a:t>`SELECT </a:t>
+                      </a:r>
+                      <a:r>
+                        <a:rPr lang="en-US" sz="900" b="0" i="0" u="none" strike="noStrike" dirty="0" err="1">
+                          <a:solidFill>
+                            <a:srgbClr val="000000"/>
+                          </a:solidFill>
+                          <a:effectLst/>
+                          <a:latin typeface="Times New Roman" panose="02020603050405020304" pitchFamily="18" charset="0"/>
+                        </a:rPr>
+                        <a:t>calculate_discount</a:t>
+                      </a:r>
+                      <a:r>
+                        <a:rPr lang="en-US" sz="900" b="0" i="0" u="none" strike="noStrike" dirty="0">
+                          <a:solidFill>
+                            <a:srgbClr val="000000"/>
+                          </a:solidFill>
+                          <a:effectLst/>
+                          <a:latin typeface="Times New Roman" panose="02020603050405020304" pitchFamily="18" charset="0"/>
+                        </a:rPr>
+                        <a:t>(100);`</a:t>
+                      </a:r>
+                    </a:p>
+                  </a:txBody>
+                  <a:tcPr marL="7124" marR="7124" marT="7124" marB="0" anchor="ctr">
+                    <a:lnL w="6350" cap="flat" cmpd="sng" algn="ctr">
+                      <a:solidFill>
+                        <a:srgbClr val="000000"/>
+                      </a:solidFill>
+                      <a:prstDash val="solid"/>
+                      <a:round/>
+                      <a:headEnd type="none" w="med" len="med"/>
+                      <a:tailEnd type="none" w="med" len="med"/>
+                    </a:lnL>
+                    <a:lnR w="6350" cap="flat" cmpd="sng" algn="ctr">
+                      <a:solidFill>
+                        <a:srgbClr val="000000"/>
+                      </a:solidFill>
+                      <a:prstDash val="solid"/>
+                      <a:round/>
+                      <a:headEnd type="none" w="med" len="med"/>
+                      <a:tailEnd type="none" w="med" len="med"/>
+                    </a:lnR>
+                    <a:lnT w="6350" cap="flat" cmpd="sng" algn="ctr">
+                      <a:solidFill>
+                        <a:srgbClr val="000000"/>
+                      </a:solidFill>
+                      <a:prstDash val="solid"/>
+                      <a:round/>
+                      <a:headEnd type="none" w="med" len="med"/>
+                      <a:tailEnd type="none" w="med" len="med"/>
+                    </a:lnT>
+                    <a:lnB w="6350" cap="flat" cmpd="sng" algn="ctr">
+                      <a:solidFill>
+                        <a:srgbClr val="000000"/>
+                      </a:solidFill>
+                      <a:prstDash val="solid"/>
+                      <a:round/>
+                      <a:headEnd type="none" w="med" len="med"/>
+                      <a:tailEnd type="none" w="med" len="med"/>
+                    </a:lnB>
+                  </a:tcPr>
+                </a:tc>
+                <a:extLst>
+                  <a:ext uri="{0D108BD9-81ED-4DB2-BD59-A6C34878D82A}">
+                    <a16:rowId xmlns:a16="http://schemas.microsoft.com/office/drawing/2014/main" val="2580267781"/>
+                  </a:ext>
+                </a:extLst>
+              </a:tr>
+            </a:tbl>
+          </a:graphicData>
+        </a:graphic>
+      </p:graphicFrame>
+    </p:spTree>
+    <p:extLst>
+      <p:ext uri="{BB962C8B-B14F-4D97-AF65-F5344CB8AC3E}">
+        <p14:creationId xmlns:p14="http://schemas.microsoft.com/office/powerpoint/2010/main" val="2518793163"/>
+      </p:ext>
+    </p:extLst>
+  </p:cSld>
+  <p:clrMapOvr>
+    <a:masterClrMapping/>
+  </p:clrMapOvr>
+</p:sld>
+</file>
+
+<file path=ppt/slides/slide4.xml><?xml version="1.0" encoding="utf-8"?>
+<p:sld xmlns:a="http://schemas.openxmlformats.org/drawingml/2006/main" xmlns:r="http://schemas.openxmlformats.org/officeDocument/2006/relationships" xmlns:p="http://schemas.openxmlformats.org/presentationml/2006/main">
+  <p:cSld>
+    <p:spTree>
+      <p:nvGrpSpPr>
+        <p:cNvPr id="1" name=""/>
+        <p:cNvGrpSpPr/>
+        <p:nvPr/>
+      </p:nvGrpSpPr>
+      <p:grpSpPr>
+        <a:xfrm>
+          <a:off x="0" y="0"/>
+          <a:ext cx="0" cy="0"/>
+          <a:chOff x="0" y="0"/>
+          <a:chExt cx="0" cy="0"/>
+        </a:xfrm>
+      </p:grpSpPr>
       <p:pic>
         <p:nvPicPr>
           <p:cNvPr id="3" name="Рисунок 2">
@@ -6330,7 +10214,7 @@
     </p:spTree>
     <p:extLst>
       <p:ext uri="{BB962C8B-B14F-4D97-AF65-F5344CB8AC3E}">
-        <p14:creationId xmlns:p14="http://schemas.microsoft.com/office/powerpoint/2010/main" val="2518793163"/>
+        <p14:creationId xmlns:p14="http://schemas.microsoft.com/office/powerpoint/2010/main" val="677588312"/>
       </p:ext>
     </p:extLst>
   </p:cSld>
@@ -6340,7 +10224,7 @@
 </p:sld>
 </file>
 
-<file path=ppt/slides/slide4.xml><?xml version="1.0" encoding="utf-8"?>
+<file path=ppt/slides/slide5.xml><?xml version="1.0" encoding="utf-8"?>
 <p:sld xmlns:a="http://schemas.openxmlformats.org/drawingml/2006/main" xmlns:r="http://schemas.openxmlformats.org/officeDocument/2006/relationships" xmlns:p="http://schemas.openxmlformats.org/presentationml/2006/main">
   <p:cSld>
     <p:spTree>
@@ -6400,7 +10284,7 @@
 </p:sld>
 </file>
 
-<file path=ppt/slides/slide5.xml><?xml version="1.0" encoding="utf-8"?>
+<file path=ppt/slides/slide6.xml><?xml version="1.0" encoding="utf-8"?>
 <p:sld xmlns:a="http://schemas.openxmlformats.org/drawingml/2006/main" xmlns:r="http://schemas.openxmlformats.org/officeDocument/2006/relationships" xmlns:p="http://schemas.openxmlformats.org/presentationml/2006/main">
   <p:cSld>
     <p:spTree>
@@ -6460,7 +10344,7 @@
 </p:sld>
 </file>
 
-<file path=ppt/slides/slide6.xml><?xml version="1.0" encoding="utf-8"?>
+<file path=ppt/slides/slide7.xml><?xml version="1.0" encoding="utf-8"?>
 <p:sld xmlns:a="http://schemas.openxmlformats.org/drawingml/2006/main" xmlns:r="http://schemas.openxmlformats.org/officeDocument/2006/relationships" xmlns:p="http://schemas.openxmlformats.org/presentationml/2006/main">
   <p:cSld>
     <p:spTree>
@@ -6520,7 +10404,7 @@
 </p:sld>
 </file>
 
-<file path=ppt/slides/slide7.xml><?xml version="1.0" encoding="utf-8"?>
+<file path=ppt/slides/slide8.xml><?xml version="1.0" encoding="utf-8"?>
 <p:sld xmlns:a="http://schemas.openxmlformats.org/drawingml/2006/main" xmlns:r="http://schemas.openxmlformats.org/officeDocument/2006/relationships" xmlns:p="http://schemas.openxmlformats.org/presentationml/2006/main">
   <p:cSld>
     <p:spTree>
@@ -6580,7 +10464,7 @@
 </p:sld>
 </file>
 
-<file path=ppt/slides/slide8.xml><?xml version="1.0" encoding="utf-8"?>
+<file path=ppt/slides/slide9.xml><?xml version="1.0" encoding="utf-8"?>
 <p:sld xmlns:a="http://schemas.openxmlformats.org/drawingml/2006/main" xmlns:r="http://schemas.openxmlformats.org/officeDocument/2006/relationships" xmlns:p="http://schemas.openxmlformats.org/presentationml/2006/main">
   <p:cSld>
     <p:spTree>
@@ -6631,66 +10515,6 @@
     <p:extLst>
       <p:ext uri="{BB962C8B-B14F-4D97-AF65-F5344CB8AC3E}">
         <p14:creationId xmlns:p14="http://schemas.microsoft.com/office/powerpoint/2010/main" val="1842355574"/>
-      </p:ext>
-    </p:extLst>
-  </p:cSld>
-  <p:clrMapOvr>
-    <a:masterClrMapping/>
-  </p:clrMapOvr>
-</p:sld>
-</file>
-
-<file path=ppt/slides/slide9.xml><?xml version="1.0" encoding="utf-8"?>
-<p:sld xmlns:a="http://schemas.openxmlformats.org/drawingml/2006/main" xmlns:r="http://schemas.openxmlformats.org/officeDocument/2006/relationships" xmlns:p="http://schemas.openxmlformats.org/presentationml/2006/main">
-  <p:cSld>
-    <p:spTree>
-      <p:nvGrpSpPr>
-        <p:cNvPr id="1" name=""/>
-        <p:cNvGrpSpPr/>
-        <p:nvPr/>
-      </p:nvGrpSpPr>
-      <p:grpSpPr>
-        <a:xfrm>
-          <a:off x="0" y="0"/>
-          <a:ext cx="0" cy="0"/>
-          <a:chOff x="0" y="0"/>
-          <a:chExt cx="0" cy="0"/>
-        </a:xfrm>
-      </p:grpSpPr>
-      <p:pic>
-        <p:nvPicPr>
-          <p:cNvPr id="2" name="Рисунок 1">
-            <a:extLst>
-              <a:ext uri="{FF2B5EF4-FFF2-40B4-BE49-F238E27FC236}">
-                <a16:creationId xmlns:a16="http://schemas.microsoft.com/office/drawing/2014/main" id="{CB2D8F1A-EF7F-4E17-AC78-30ED17732383}"/>
-              </a:ext>
-            </a:extLst>
-          </p:cNvPr>
-          <p:cNvPicPr>
-            <a:picLocks noChangeAspect="1"/>
-          </p:cNvPicPr>
-          <p:nvPr/>
-        </p:nvPicPr>
-        <p:blipFill>
-          <a:blip r:embed="rId2"/>
-          <a:stretch>
-            <a:fillRect/>
-          </a:stretch>
-        </p:blipFill>
-        <p:spPr>
-          <a:xfrm>
-            <a:off x="1543474" y="0"/>
-            <a:ext cx="9105052" cy="6858000"/>
-          </a:xfrm>
-          <a:prstGeom prst="rect">
-            <a:avLst/>
-          </a:prstGeom>
-        </p:spPr>
-      </p:pic>
-    </p:spTree>
-    <p:extLst>
-      <p:ext uri="{BB962C8B-B14F-4D97-AF65-F5344CB8AC3E}">
-        <p14:creationId xmlns:p14="http://schemas.microsoft.com/office/powerpoint/2010/main" val="3333639815"/>
       </p:ext>
     </p:extLst>
   </p:cSld>
